--- a/slides/shiny-workshop.pptx
+++ b/slides/shiny-workshop.pptx
@@ -6,7 +6,7 @@
     <p:sldMasterId id="2147483655" r:id="rId5"/>
   </p:sldMasterIdLst>
   <p:notesMasterIdLst>
-    <p:notesMasterId r:id="rId33"/>
+    <p:notesMasterId r:id="rId34"/>
   </p:notesMasterIdLst>
   <p:sldIdLst>
     <p:sldId id="256" r:id="rId9"/>
@@ -33,6 +33,7 @@
     <p:sldId id="277" r:id="rId30"/>
     <p:sldId id="278" r:id="rId31"/>
     <p:sldId id="279" r:id="rId32"/>
+    <p:sldId id="280" r:id="rId33"/>
   </p:sldIdLst>
   <p:sldSz cx="12192000" cy="6858000"/>
   <p:notesSz cx="6858000" cy="9144000"/>
@@ -163,7 +164,7 @@
       </p:grpSpPr>
       <p:sp>
         <p:nvSpPr>
-          <p:cNvPr id="1825468783" name="Header Placeholder 1"/>
+          <p:cNvPr id="2132963116" name="Header Placeholder 1"/>
           <p:cNvSpPr>
             <a:spLocks noGrp="1"/>
           </p:cNvSpPr>
@@ -197,7 +198,7 @@
       </p:sp>
       <p:sp>
         <p:nvSpPr>
-          <p:cNvPr id="1911297705" name="Date Placeholder 2"/>
+          <p:cNvPr id="612524220" name="Date Placeholder 2"/>
           <p:cNvSpPr>
             <a:spLocks noGrp="1"/>
           </p:cNvSpPr>
@@ -235,7 +236,7 @@
       </p:sp>
       <p:sp>
         <p:nvSpPr>
-          <p:cNvPr id="953019793" name="Slide Image Placeholder 3"/>
+          <p:cNvPr id="987991893" name="Slide Image Placeholder 3"/>
           <p:cNvSpPr>
             <a:spLocks noChangeAspect="1" noGrp="1" noRot="1"/>
           </p:cNvSpPr>
@@ -271,7 +272,7 @@
       </p:sp>
       <p:sp>
         <p:nvSpPr>
-          <p:cNvPr id="1757605117" name="Notes Placeholder 4"/>
+          <p:cNvPr id="1594026202" name="Notes Placeholder 4"/>
           <p:cNvSpPr>
             <a:spLocks noGrp="1"/>
           </p:cNvSpPr>
@@ -345,7 +346,7 @@
       </p:sp>
       <p:sp>
         <p:nvSpPr>
-          <p:cNvPr id="1388642923" name="Footer Placeholder 5"/>
+          <p:cNvPr id="800672328" name="Footer Placeholder 5"/>
           <p:cNvSpPr>
             <a:spLocks noGrp="1"/>
           </p:cNvSpPr>
@@ -379,7 +380,7 @@
       </p:sp>
       <p:sp>
         <p:nvSpPr>
-          <p:cNvPr id="1547002163" name="Slide Number Placeholder 6"/>
+          <p:cNvPr id="107212711" name="Slide Number Placeholder 6"/>
           <p:cNvSpPr>
             <a:spLocks noGrp="1"/>
           </p:cNvSpPr>
@@ -533,7 +534,7 @@
       </p:grpSpPr>
       <p:sp>
         <p:nvSpPr>
-          <p:cNvPr id="950405824" name="Slide Image Placeholder 1"/>
+          <p:cNvPr id="178307724" name="Slide Image Placeholder 1"/>
           <p:cNvSpPr>
             <a:spLocks noChangeAspect="1" noGrp="1" noRot="1"/>
           </p:cNvSpPr>
@@ -545,7 +546,7 @@
       </p:sp>
       <p:sp>
         <p:nvSpPr>
-          <p:cNvPr id="2064239631" name="Notes Placeholder 2"/>
+          <p:cNvPr id="1667988540" name="Notes Placeholder 2"/>
           <p:cNvSpPr>
             <a:spLocks noGrp="1"/>
           </p:cNvSpPr>
@@ -567,7 +568,7 @@
       </p:sp>
       <p:sp>
         <p:nvSpPr>
-          <p:cNvPr id="1775854095" name="Slide Number Placeholder 3"/>
+          <p:cNvPr id="2130167153" name="Slide Number Placeholder 3"/>
           <p:cNvSpPr>
             <a:spLocks noGrp="1"/>
           </p:cNvSpPr>
@@ -618,7 +619,7 @@
       </p:grpSpPr>
       <p:sp>
         <p:nvSpPr>
-          <p:cNvPr id="104934887" name="Slide Image Placeholder 1"/>
+          <p:cNvPr id="222216868" name="Slide Image Placeholder 1"/>
           <p:cNvSpPr>
             <a:spLocks noChangeAspect="1" noGrp="1" noRot="1"/>
           </p:cNvSpPr>
@@ -630,7 +631,7 @@
       </p:sp>
       <p:sp>
         <p:nvSpPr>
-          <p:cNvPr id="301676592" name="Notes Placeholder 2"/>
+          <p:cNvPr id="501397054" name="Notes Placeholder 2"/>
           <p:cNvSpPr>
             <a:spLocks noGrp="1"/>
           </p:cNvSpPr>
@@ -656,7 +657,7 @@
       </p:sp>
       <p:sp>
         <p:nvSpPr>
-          <p:cNvPr id="153228147" name="Slide Number Placeholder 3"/>
+          <p:cNvPr id="1292830242" name="Slide Number Placeholder 3"/>
           <p:cNvSpPr>
             <a:spLocks noGrp="1"/>
           </p:cNvSpPr>
@@ -707,7 +708,7 @@
       </p:grpSpPr>
       <p:sp>
         <p:nvSpPr>
-          <p:cNvPr id="1318521187" name="Slide Image Placeholder 1"/>
+          <p:cNvPr id="1374189227" name="Slide Image Placeholder 1"/>
           <p:cNvSpPr>
             <a:spLocks noChangeAspect="1" noGrp="1" noRot="1"/>
           </p:cNvSpPr>
@@ -719,7 +720,7 @@
       </p:sp>
       <p:sp>
         <p:nvSpPr>
-          <p:cNvPr id="1874107571" name="Notes Placeholder 2"/>
+          <p:cNvPr id="285413193" name="Notes Placeholder 2"/>
           <p:cNvSpPr>
             <a:spLocks noGrp="1"/>
           </p:cNvSpPr>
@@ -745,7 +746,7 @@
       </p:sp>
       <p:sp>
         <p:nvSpPr>
-          <p:cNvPr id="1427703241" name="Slide Number Placeholder 3"/>
+          <p:cNvPr id="166684629" name="Slide Number Placeholder 3"/>
           <p:cNvSpPr>
             <a:spLocks noGrp="1"/>
           </p:cNvSpPr>
@@ -796,7 +797,7 @@
       </p:grpSpPr>
       <p:sp>
         <p:nvSpPr>
-          <p:cNvPr id="806602335" name="Slide Image Placeholder 1"/>
+          <p:cNvPr id="185212815" name="Slide Image Placeholder 1"/>
           <p:cNvSpPr>
             <a:spLocks noChangeAspect="1" noGrp="1" noRot="1"/>
           </p:cNvSpPr>
@@ -808,7 +809,7 @@
       </p:sp>
       <p:sp>
         <p:nvSpPr>
-          <p:cNvPr id="1561801263" name="Notes Placeholder 2"/>
+          <p:cNvPr id="127495078" name="Notes Placeholder 2"/>
           <p:cNvSpPr>
             <a:spLocks noGrp="1"/>
           </p:cNvSpPr>
@@ -834,7 +835,7 @@
       </p:sp>
       <p:sp>
         <p:nvSpPr>
-          <p:cNvPr id="606519521" name="Slide Number Placeholder 3"/>
+          <p:cNvPr id="134708577" name="Slide Number Placeholder 3"/>
           <p:cNvSpPr>
             <a:spLocks noGrp="1"/>
           </p:cNvSpPr>
@@ -885,7 +886,7 @@
       </p:grpSpPr>
       <p:sp>
         <p:nvSpPr>
-          <p:cNvPr id="1567963019" name="Slide Image Placeholder 1"/>
+          <p:cNvPr id="272142796" name="Slide Image Placeholder 1"/>
           <p:cNvSpPr>
             <a:spLocks noChangeAspect="1" noGrp="1" noRot="1"/>
           </p:cNvSpPr>
@@ -897,7 +898,7 @@
       </p:sp>
       <p:sp>
         <p:nvSpPr>
-          <p:cNvPr id="351580616" name="Notes Placeholder 2"/>
+          <p:cNvPr id="1195202427" name="Notes Placeholder 2"/>
           <p:cNvSpPr>
             <a:spLocks noGrp="1"/>
           </p:cNvSpPr>
@@ -923,7 +924,7 @@
       </p:sp>
       <p:sp>
         <p:nvSpPr>
-          <p:cNvPr id="531268624" name="Slide Number Placeholder 3"/>
+          <p:cNvPr id="1569633285" name="Slide Number Placeholder 3"/>
           <p:cNvSpPr>
             <a:spLocks noGrp="1"/>
           </p:cNvSpPr>
@@ -974,7 +975,7 @@
       </p:grpSpPr>
       <p:sp>
         <p:nvSpPr>
-          <p:cNvPr id="1182994111" name="Slide Image Placeholder 1"/>
+          <p:cNvPr id="1455440679" name="Slide Image Placeholder 1"/>
           <p:cNvSpPr>
             <a:spLocks noChangeAspect="1" noGrp="1" noRot="1"/>
           </p:cNvSpPr>
@@ -986,7 +987,7 @@
       </p:sp>
       <p:sp>
         <p:nvSpPr>
-          <p:cNvPr id="1092314324" name="Notes Placeholder 2"/>
+          <p:cNvPr id="2114732017" name="Notes Placeholder 2"/>
           <p:cNvSpPr>
             <a:spLocks noGrp="1"/>
           </p:cNvSpPr>
@@ -1028,7 +1029,7 @@
       </p:sp>
       <p:sp>
         <p:nvSpPr>
-          <p:cNvPr id="1231914009" name="Slide Number Placeholder 3"/>
+          <p:cNvPr id="2094750380" name="Slide Number Placeholder 3"/>
           <p:cNvSpPr>
             <a:spLocks noGrp="1"/>
           </p:cNvSpPr>
@@ -1079,7 +1080,7 @@
       </p:grpSpPr>
       <p:sp>
         <p:nvSpPr>
-          <p:cNvPr id="2023588041" name="Slide Image Placeholder 1"/>
+          <p:cNvPr id="1589353986" name="Slide Image Placeholder 1"/>
           <p:cNvSpPr>
             <a:spLocks noChangeAspect="1" noGrp="1" noRot="1"/>
           </p:cNvSpPr>
@@ -1091,7 +1092,7 @@
       </p:sp>
       <p:sp>
         <p:nvSpPr>
-          <p:cNvPr id="1534942191" name="Notes Placeholder 2"/>
+          <p:cNvPr id="706011366" name="Notes Placeholder 2"/>
           <p:cNvSpPr>
             <a:spLocks noGrp="1"/>
           </p:cNvSpPr>
@@ -1149,7 +1150,7 @@
       </p:sp>
       <p:sp>
         <p:nvSpPr>
-          <p:cNvPr id="637721779" name="Slide Number Placeholder 3"/>
+          <p:cNvPr id="585760349" name="Slide Number Placeholder 3"/>
           <p:cNvSpPr>
             <a:spLocks noGrp="1"/>
           </p:cNvSpPr>
@@ -1200,7 +1201,7 @@
       </p:grpSpPr>
       <p:sp>
         <p:nvSpPr>
-          <p:cNvPr id="121806184" name="Slide Image Placeholder 1"/>
+          <p:cNvPr id="483734601" name="Slide Image Placeholder 1"/>
           <p:cNvSpPr>
             <a:spLocks noChangeAspect="1" noGrp="1" noRot="1"/>
           </p:cNvSpPr>
@@ -1212,7 +1213,7 @@
       </p:sp>
       <p:sp>
         <p:nvSpPr>
-          <p:cNvPr id="966539454" name="Notes Placeholder 2"/>
+          <p:cNvPr id="285991358" name="Notes Placeholder 2"/>
           <p:cNvSpPr>
             <a:spLocks noGrp="1"/>
           </p:cNvSpPr>
@@ -1234,7 +1235,7 @@
       </p:sp>
       <p:sp>
         <p:nvSpPr>
-          <p:cNvPr id="804928813" name="Slide Number Placeholder 3"/>
+          <p:cNvPr id="1187606109" name="Slide Number Placeholder 3"/>
           <p:cNvSpPr>
             <a:spLocks noGrp="1"/>
           </p:cNvSpPr>
@@ -1285,7 +1286,7 @@
       </p:grpSpPr>
       <p:sp>
         <p:nvSpPr>
-          <p:cNvPr id="2067602656" name="Slide Image Placeholder 1"/>
+          <p:cNvPr id="1444505735" name="Slide Image Placeholder 1"/>
           <p:cNvSpPr>
             <a:spLocks noChangeAspect="1" noGrp="1" noRot="1"/>
           </p:cNvSpPr>
@@ -1297,7 +1298,7 @@
       </p:sp>
       <p:sp>
         <p:nvSpPr>
-          <p:cNvPr id="1932395240" name="Notes Placeholder 2"/>
+          <p:cNvPr id="677508534" name="Notes Placeholder 2"/>
           <p:cNvSpPr>
             <a:spLocks noGrp="1"/>
           </p:cNvSpPr>
@@ -1319,7 +1320,7 @@
       </p:sp>
       <p:sp>
         <p:nvSpPr>
-          <p:cNvPr id="1689976286" name="Slide Number Placeholder 3"/>
+          <p:cNvPr id="1015448921" name="Slide Number Placeholder 3"/>
           <p:cNvSpPr>
             <a:spLocks noGrp="1"/>
           </p:cNvSpPr>
@@ -1370,7 +1371,7 @@
       </p:grpSpPr>
       <p:sp>
         <p:nvSpPr>
-          <p:cNvPr id="448525741" name="Slide Image Placeholder 1"/>
+          <p:cNvPr id="1427082687" name="Slide Image Placeholder 1"/>
           <p:cNvSpPr>
             <a:spLocks noChangeAspect="1" noGrp="1" noRot="1"/>
           </p:cNvSpPr>
@@ -1382,7 +1383,7 @@
       </p:sp>
       <p:sp>
         <p:nvSpPr>
-          <p:cNvPr id="414446138" name="Notes Placeholder 2"/>
+          <p:cNvPr id="359437827" name="Notes Placeholder 2"/>
           <p:cNvSpPr>
             <a:spLocks noGrp="1"/>
           </p:cNvSpPr>
@@ -1404,7 +1405,7 @@
       </p:sp>
       <p:sp>
         <p:nvSpPr>
-          <p:cNvPr id="168883469" name="Slide Number Placeholder 3"/>
+          <p:cNvPr id="684548787" name="Slide Number Placeholder 3"/>
           <p:cNvSpPr>
             <a:spLocks noGrp="1"/>
           </p:cNvSpPr>
@@ -1455,7 +1456,7 @@
       </p:grpSpPr>
       <p:sp>
         <p:nvSpPr>
-          <p:cNvPr id="183473758" name="Slide Image Placeholder 1"/>
+          <p:cNvPr id="1794694088" name="Slide Image Placeholder 1"/>
           <p:cNvSpPr>
             <a:spLocks noChangeAspect="1" noGrp="1" noRot="1"/>
           </p:cNvSpPr>
@@ -1467,7 +1468,7 @@
       </p:sp>
       <p:sp>
         <p:nvSpPr>
-          <p:cNvPr id="471419449" name="Notes Placeholder 2"/>
+          <p:cNvPr id="337758619" name="Notes Placeholder 2"/>
           <p:cNvSpPr>
             <a:spLocks noGrp="1"/>
           </p:cNvSpPr>
@@ -1489,7 +1490,7 @@
       </p:sp>
       <p:sp>
         <p:nvSpPr>
-          <p:cNvPr id="2099652239" name="Slide Number Placeholder 3"/>
+          <p:cNvPr id="974079054" name="Slide Number Placeholder 3"/>
           <p:cNvSpPr>
             <a:spLocks noGrp="1"/>
           </p:cNvSpPr>
@@ -1540,7 +1541,7 @@
       </p:grpSpPr>
       <p:sp>
         <p:nvSpPr>
-          <p:cNvPr id="1412428721" name="Slide Image Placeholder 1"/>
+          <p:cNvPr id="49571681" name="Slide Image Placeholder 1"/>
           <p:cNvSpPr>
             <a:spLocks noChangeAspect="1" noGrp="1" noRot="1"/>
           </p:cNvSpPr>
@@ -1552,7 +1553,7 @@
       </p:sp>
       <p:sp>
         <p:nvSpPr>
-          <p:cNvPr id="307446456" name="Notes Placeholder 2"/>
+          <p:cNvPr id="1595207964" name="Notes Placeholder 2"/>
           <p:cNvSpPr>
             <a:spLocks noGrp="1"/>
           </p:cNvSpPr>
@@ -1601,7 +1602,7 @@
       </p:sp>
       <p:sp>
         <p:nvSpPr>
-          <p:cNvPr id="303448301" name="Slide Number Placeholder 3"/>
+          <p:cNvPr id="495317207" name="Slide Number Placeholder 3"/>
           <p:cNvSpPr>
             <a:spLocks noGrp="1"/>
           </p:cNvSpPr>
@@ -1652,7 +1653,7 @@
       </p:grpSpPr>
       <p:sp>
         <p:nvSpPr>
-          <p:cNvPr id="1423622370" name="Slide Image Placeholder 1"/>
+          <p:cNvPr id="1802154003" name="Slide Image Placeholder 1"/>
           <p:cNvSpPr>
             <a:spLocks noChangeAspect="1" noGrp="1" noRot="1"/>
           </p:cNvSpPr>
@@ -1664,7 +1665,7 @@
       </p:sp>
       <p:sp>
         <p:nvSpPr>
-          <p:cNvPr id="1822734274" name="Notes Placeholder 2"/>
+          <p:cNvPr id="895010323" name="Notes Placeholder 2"/>
           <p:cNvSpPr>
             <a:spLocks noGrp="1"/>
           </p:cNvSpPr>
@@ -1690,7 +1691,7 @@
       </p:sp>
       <p:sp>
         <p:nvSpPr>
-          <p:cNvPr id="1469501582" name="Slide Number Placeholder 3"/>
+          <p:cNvPr id="1494031714" name="Slide Number Placeholder 3"/>
           <p:cNvSpPr>
             <a:spLocks noGrp="1"/>
           </p:cNvSpPr>
@@ -1741,7 +1742,7 @@
       </p:grpSpPr>
       <p:sp>
         <p:nvSpPr>
-          <p:cNvPr id="586215502" name="Slide Image Placeholder 1"/>
+          <p:cNvPr id="747397828" name="Slide Image Placeholder 1"/>
           <p:cNvSpPr>
             <a:spLocks noChangeAspect="1" noGrp="1" noRot="1"/>
           </p:cNvSpPr>
@@ -1753,7 +1754,7 @@
       </p:sp>
       <p:sp>
         <p:nvSpPr>
-          <p:cNvPr id="419006233" name="Notes Placeholder 2"/>
+          <p:cNvPr id="941741412" name="Notes Placeholder 2"/>
           <p:cNvSpPr>
             <a:spLocks noGrp="1"/>
           </p:cNvSpPr>
@@ -1795,7 +1796,7 @@
       </p:sp>
       <p:sp>
         <p:nvSpPr>
-          <p:cNvPr id="529043004" name="Slide Number Placeholder 3"/>
+          <p:cNvPr id="118687117" name="Slide Number Placeholder 3"/>
           <p:cNvSpPr>
             <a:spLocks noGrp="1"/>
           </p:cNvSpPr>
@@ -1846,7 +1847,7 @@
       </p:grpSpPr>
       <p:sp>
         <p:nvSpPr>
-          <p:cNvPr id="1391382384" name="Slide Image Placeholder 1"/>
+          <p:cNvPr id="2045309161" name="Slide Image Placeholder 1"/>
           <p:cNvSpPr>
             <a:spLocks noChangeAspect="1" noGrp="1" noRot="1"/>
           </p:cNvSpPr>
@@ -1858,7 +1859,7 @@
       </p:sp>
       <p:sp>
         <p:nvSpPr>
-          <p:cNvPr id="1751675157" name="Notes Placeholder 2"/>
+          <p:cNvPr id="931905501" name="Notes Placeholder 2"/>
           <p:cNvSpPr>
             <a:spLocks noGrp="1"/>
           </p:cNvSpPr>
@@ -1880,7 +1881,7 @@
       </p:sp>
       <p:sp>
         <p:nvSpPr>
-          <p:cNvPr id="2106696436" name="Slide Number Placeholder 3"/>
+          <p:cNvPr id="494317202" name="Slide Number Placeholder 3"/>
           <p:cNvSpPr>
             <a:spLocks noGrp="1"/>
           </p:cNvSpPr>
@@ -1931,7 +1932,7 @@
       </p:grpSpPr>
       <p:sp>
         <p:nvSpPr>
-          <p:cNvPr id="1888220939" name="Slide Image Placeholder 1"/>
+          <p:cNvPr id="1266280246" name="Slide Image Placeholder 1"/>
           <p:cNvSpPr>
             <a:spLocks noChangeAspect="1" noGrp="1" noRot="1"/>
           </p:cNvSpPr>
@@ -1943,7 +1944,7 @@
       </p:sp>
       <p:sp>
         <p:nvSpPr>
-          <p:cNvPr id="1444658592" name="Notes Placeholder 2"/>
+          <p:cNvPr id="401625285" name="Notes Placeholder 2"/>
           <p:cNvSpPr>
             <a:spLocks noGrp="1"/>
           </p:cNvSpPr>
@@ -1989,7 +1990,7 @@
       </p:sp>
       <p:sp>
         <p:nvSpPr>
-          <p:cNvPr id="1566373002" name="Slide Number Placeholder 3"/>
+          <p:cNvPr id="74776483" name="Slide Number Placeholder 3"/>
           <p:cNvSpPr>
             <a:spLocks noGrp="1"/>
           </p:cNvSpPr>
@@ -2040,7 +2041,7 @@
       </p:grpSpPr>
       <p:sp>
         <p:nvSpPr>
-          <p:cNvPr id="186995646" name="Slide Image Placeholder 1"/>
+          <p:cNvPr id="438190711" name="Slide Image Placeholder 1"/>
           <p:cNvSpPr>
             <a:spLocks noChangeAspect="1" noGrp="1" noRot="1"/>
           </p:cNvSpPr>
@@ -2052,7 +2053,7 @@
       </p:sp>
       <p:sp>
         <p:nvSpPr>
-          <p:cNvPr id="426475294" name="Notes Placeholder 2"/>
+          <p:cNvPr id="2116767637" name="Notes Placeholder 2"/>
           <p:cNvSpPr>
             <a:spLocks noGrp="1"/>
           </p:cNvSpPr>
@@ -2098,7 +2099,7 @@
       </p:sp>
       <p:sp>
         <p:nvSpPr>
-          <p:cNvPr id="231827823" name="Slide Number Placeholder 3"/>
+          <p:cNvPr id="895318134" name="Slide Number Placeholder 3"/>
           <p:cNvSpPr>
             <a:spLocks noGrp="1"/>
           </p:cNvSpPr>
@@ -2117,6 +2118,91 @@
             <a:fld id="{A7759C82-3216-8C27-67AE-BEE749ACD5CD}" type="slidenum">
               <a:rPr/>
               <a:t>23</a:t>
+            </a:fld>
+            <a:endParaRPr/>
+          </a:p>
+        </p:txBody>
+      </p:sp>
+    </p:spTree>
+  </p:cSld>
+  <p:clrMapOvr>
+    <a:masterClrMapping/>
+  </p:clrMapOvr>
+</p:notes>
+</file>
+
+<file path=ppt/notesSlides/notesSlide25.xml><?xml version="1.0" encoding="utf-8"?>
+<p:notes xmlns:a="http://schemas.openxmlformats.org/drawingml/2006/main" xmlns:r="http://schemas.openxmlformats.org/officeDocument/2006/relationships" xmlns:p="http://schemas.openxmlformats.org/presentationml/2006/main" xmlns:m="http://schemas.openxmlformats.org/officeDocument/2006/math" xmlns:w="http://schemas.openxmlformats.org/wordprocessingml/2006/main">
+  <p:cSld name="">
+    <p:spTree>
+      <p:nvGrpSpPr>
+        <p:cNvPr id="1" name=""/>
+        <p:cNvGrpSpPr/>
+        <p:nvPr/>
+      </p:nvGrpSpPr>
+      <p:grpSpPr bwMode="auto">
+        <a:xfrm>
+          <a:off x="0" y="0"/>
+          <a:ext cx="0" cy="0"/>
+          <a:chOff x="0" y="0"/>
+          <a:chExt cx="0" cy="0"/>
+        </a:xfrm>
+      </p:grpSpPr>
+      <p:sp>
+        <p:nvSpPr>
+          <p:cNvPr id="575082604" name="Slide Image Placeholder 1"/>
+          <p:cNvSpPr>
+            <a:spLocks noChangeAspect="1" noGrp="1" noRot="1"/>
+          </p:cNvSpPr>
+          <p:nvPr>
+            <p:ph type="sldImg"/>
+          </p:nvPr>
+        </p:nvSpPr>
+        <p:spPr bwMode="auto"/>
+      </p:sp>
+      <p:sp>
+        <p:nvSpPr>
+          <p:cNvPr id="397233243" name="Notes Placeholder 2"/>
+          <p:cNvSpPr>
+            <a:spLocks noGrp="1"/>
+          </p:cNvSpPr>
+          <p:nvPr>
+            <p:ph type="body" idx="1"/>
+          </p:nvPr>
+        </p:nvSpPr>
+        <p:spPr bwMode="auto"/>
+        <p:txBody>
+          <a:bodyPr/>
+          <a:lstStyle/>
+          <a:p>
+            <a:pPr>
+              <a:defRPr/>
+            </a:pPr>
+            <a:endParaRPr/>
+          </a:p>
+        </p:txBody>
+      </p:sp>
+      <p:sp>
+        <p:nvSpPr>
+          <p:cNvPr id="874642659" name="Slide Number Placeholder 3"/>
+          <p:cNvSpPr>
+            <a:spLocks noGrp="1"/>
+          </p:cNvSpPr>
+          <p:nvPr>
+            <p:ph type="sldNum" sz="quarter" idx="10"/>
+          </p:nvPr>
+        </p:nvSpPr>
+        <p:spPr bwMode="auto"/>
+        <p:txBody>
+          <a:bodyPr/>
+          <a:lstStyle/>
+          <a:p>
+            <a:pPr>
+              <a:defRPr/>
+            </a:pPr>
+            <a:fld id="{84995EA5-D428-D048-E561-A3F62CC7F240}" type="slidenum">
+              <a:rPr/>
+              <a:t/>
             </a:fld>
             <a:endParaRPr/>
           </a:p>
@@ -2149,7 +2235,7 @@
       </p:grpSpPr>
       <p:sp>
         <p:nvSpPr>
-          <p:cNvPr id="1984236386" name="Slide Image Placeholder 1"/>
+          <p:cNvPr id="1889873294" name="Slide Image Placeholder 1"/>
           <p:cNvSpPr>
             <a:spLocks noChangeAspect="1" noGrp="1" noRot="1"/>
           </p:cNvSpPr>
@@ -2161,7 +2247,7 @@
       </p:sp>
       <p:sp>
         <p:nvSpPr>
-          <p:cNvPr id="220816137" name="Notes Placeholder 2"/>
+          <p:cNvPr id="237150025" name="Notes Placeholder 2"/>
           <p:cNvSpPr>
             <a:spLocks noGrp="1"/>
           </p:cNvSpPr>
@@ -2183,7 +2269,7 @@
       </p:sp>
       <p:sp>
         <p:nvSpPr>
-          <p:cNvPr id="1168856576" name="Slide Number Placeholder 3"/>
+          <p:cNvPr id="520231121" name="Slide Number Placeholder 3"/>
           <p:cNvSpPr>
             <a:spLocks noGrp="1"/>
           </p:cNvSpPr>
@@ -2234,7 +2320,7 @@
       </p:grpSpPr>
       <p:sp>
         <p:nvSpPr>
-          <p:cNvPr id="1681756012" name="Slide Image Placeholder 1"/>
+          <p:cNvPr id="2068206078" name="Slide Image Placeholder 1"/>
           <p:cNvSpPr>
             <a:spLocks noChangeAspect="1" noGrp="1" noRot="1"/>
           </p:cNvSpPr>
@@ -2246,7 +2332,7 @@
       </p:sp>
       <p:sp>
         <p:nvSpPr>
-          <p:cNvPr id="1726436448" name="Notes Placeholder 2"/>
+          <p:cNvPr id="1120329207" name="Notes Placeholder 2"/>
           <p:cNvSpPr>
             <a:spLocks noGrp="1"/>
           </p:cNvSpPr>
@@ -2268,7 +2354,7 @@
       </p:sp>
       <p:sp>
         <p:nvSpPr>
-          <p:cNvPr id="1046086008" name="Slide Number Placeholder 3"/>
+          <p:cNvPr id="2018510733" name="Slide Number Placeholder 3"/>
           <p:cNvSpPr>
             <a:spLocks noGrp="1"/>
           </p:cNvSpPr>
@@ -2319,7 +2405,7 @@
       </p:grpSpPr>
       <p:sp>
         <p:nvSpPr>
-          <p:cNvPr id="1153478623" name="Slide Image Placeholder 1"/>
+          <p:cNvPr id="734463243" name="Slide Image Placeholder 1"/>
           <p:cNvSpPr>
             <a:spLocks noChangeAspect="1" noGrp="1" noRot="1"/>
           </p:cNvSpPr>
@@ -2331,7 +2417,7 @@
       </p:sp>
       <p:sp>
         <p:nvSpPr>
-          <p:cNvPr id="607574041" name="Notes Placeholder 2"/>
+          <p:cNvPr id="657944377" name="Notes Placeholder 2"/>
           <p:cNvSpPr>
             <a:spLocks noGrp="1"/>
           </p:cNvSpPr>
@@ -2367,7 +2453,7 @@
       </p:sp>
       <p:sp>
         <p:nvSpPr>
-          <p:cNvPr id="1332093343" name="Slide Number Placeholder 3"/>
+          <p:cNvPr id="1672727766" name="Slide Number Placeholder 3"/>
           <p:cNvSpPr>
             <a:spLocks noGrp="1"/>
           </p:cNvSpPr>
@@ -2418,7 +2504,7 @@
       </p:grpSpPr>
       <p:sp>
         <p:nvSpPr>
-          <p:cNvPr id="1826419204" name="Slide Image Placeholder 1"/>
+          <p:cNvPr id="442593746" name="Slide Image Placeholder 1"/>
           <p:cNvSpPr>
             <a:spLocks noChangeAspect="1" noGrp="1" noRot="1"/>
           </p:cNvSpPr>
@@ -2430,7 +2516,7 @@
       </p:sp>
       <p:sp>
         <p:nvSpPr>
-          <p:cNvPr id="1693331204" name="Notes Placeholder 2"/>
+          <p:cNvPr id="1675232982" name="Notes Placeholder 2"/>
           <p:cNvSpPr>
             <a:spLocks noGrp="1"/>
           </p:cNvSpPr>
@@ -2456,7 +2542,7 @@
       </p:sp>
       <p:sp>
         <p:nvSpPr>
-          <p:cNvPr id="116412654" name="Slide Number Placeholder 3"/>
+          <p:cNvPr id="2011711375" name="Slide Number Placeholder 3"/>
           <p:cNvSpPr>
             <a:spLocks noGrp="1"/>
           </p:cNvSpPr>
@@ -2507,7 +2593,7 @@
       </p:grpSpPr>
       <p:sp>
         <p:nvSpPr>
-          <p:cNvPr id="1898173474" name="Slide Image Placeholder 1"/>
+          <p:cNvPr id="266811885" name="Slide Image Placeholder 1"/>
           <p:cNvSpPr>
             <a:spLocks noChangeAspect="1" noGrp="1" noRot="1"/>
           </p:cNvSpPr>
@@ -2519,7 +2605,7 @@
       </p:sp>
       <p:sp>
         <p:nvSpPr>
-          <p:cNvPr id="1603896295" name="Notes Placeholder 2"/>
+          <p:cNvPr id="113424399" name="Notes Placeholder 2"/>
           <p:cNvSpPr>
             <a:spLocks noGrp="1"/>
           </p:cNvSpPr>
@@ -2569,7 +2655,7 @@
       </p:sp>
       <p:sp>
         <p:nvSpPr>
-          <p:cNvPr id="2102251065" name="Slide Number Placeholder 3"/>
+          <p:cNvPr id="1278350742" name="Slide Number Placeholder 3"/>
           <p:cNvSpPr>
             <a:spLocks noGrp="1"/>
           </p:cNvSpPr>
@@ -2620,7 +2706,7 @@
       </p:grpSpPr>
       <p:sp>
         <p:nvSpPr>
-          <p:cNvPr id="1001035941" name="Slide Image Placeholder 1"/>
+          <p:cNvPr id="1162503990" name="Slide Image Placeholder 1"/>
           <p:cNvSpPr>
             <a:spLocks noChangeAspect="1" noGrp="1" noRot="1"/>
           </p:cNvSpPr>
@@ -2632,7 +2718,7 @@
       </p:sp>
       <p:sp>
         <p:nvSpPr>
-          <p:cNvPr id="990714660" name="Notes Placeholder 2"/>
+          <p:cNvPr id="1789760651" name="Notes Placeholder 2"/>
           <p:cNvSpPr>
             <a:spLocks noGrp="1"/>
           </p:cNvSpPr>
@@ -2674,7 +2760,7 @@
       </p:sp>
       <p:sp>
         <p:nvSpPr>
-          <p:cNvPr id="1130993403" name="Slide Number Placeholder 3"/>
+          <p:cNvPr id="1692114689" name="Slide Number Placeholder 3"/>
           <p:cNvSpPr>
             <a:spLocks noGrp="1"/>
           </p:cNvSpPr>
@@ -2725,7 +2811,7 @@
       </p:grpSpPr>
       <p:sp>
         <p:nvSpPr>
-          <p:cNvPr id="410332828" name="Slide Image Placeholder 1"/>
+          <p:cNvPr id="1893063877" name="Slide Image Placeholder 1"/>
           <p:cNvSpPr>
             <a:spLocks noChangeAspect="1" noGrp="1" noRot="1"/>
           </p:cNvSpPr>
@@ -2737,7 +2823,7 @@
       </p:sp>
       <p:sp>
         <p:nvSpPr>
-          <p:cNvPr id="1814284290" name="Notes Placeholder 2"/>
+          <p:cNvPr id="721575472" name="Notes Placeholder 2"/>
           <p:cNvSpPr>
             <a:spLocks noGrp="1"/>
           </p:cNvSpPr>
@@ -2763,7 +2849,7 @@
       </p:sp>
       <p:sp>
         <p:nvSpPr>
-          <p:cNvPr id="1020398061" name="Slide Number Placeholder 3"/>
+          <p:cNvPr id="159955562" name="Slide Number Placeholder 3"/>
           <p:cNvSpPr>
             <a:spLocks noGrp="1"/>
           </p:cNvSpPr>
@@ -2814,7 +2900,7 @@
       </p:grpSpPr>
       <p:sp>
         <p:nvSpPr>
-          <p:cNvPr id="811945257" name="Title 1"/>
+          <p:cNvPr id="1230625116" name="Title 1"/>
           <p:cNvSpPr>
             <a:spLocks noGrp="1"/>
           </p:cNvSpPr>
@@ -2852,7 +2938,7 @@
       </p:sp>
       <p:sp>
         <p:nvSpPr>
-          <p:cNvPr id="2034622216" name="Title 1" descr="subtitle&#10;"/>
+          <p:cNvPr id="1449761463" name="Title 1" descr="subtitle&#10;"/>
           <p:cNvSpPr txBox="1"/>
           <p:nvPr userDrawn="1"/>
         </p:nvSpPr>
@@ -2900,7 +2986,7 @@
       </p:sp>
       <p:sp>
         <p:nvSpPr>
-          <p:cNvPr id="2057762619" name="Rectangle 7"/>
+          <p:cNvPr id="6444399" name="Rectangle 7"/>
           <p:cNvSpPr/>
           <p:nvPr userDrawn="1"/>
         </p:nvSpPr>
@@ -2975,7 +3061,7 @@
       </p:grpSpPr>
       <p:sp>
         <p:nvSpPr>
-          <p:cNvPr id="649035445" name="Title 1"/>
+          <p:cNvPr id="819679034" name="Title 1"/>
           <p:cNvSpPr>
             <a:spLocks noGrp="1"/>
           </p:cNvSpPr>
@@ -3025,7 +3111,7 @@
       </p:sp>
       <p:sp>
         <p:nvSpPr>
-          <p:cNvPr id="1176234452" name="Content Placeholder 2"/>
+          <p:cNvPr id="14755552" name="Content Placeholder 2"/>
           <p:cNvSpPr>
             <a:spLocks noGrp="1"/>
           </p:cNvSpPr>
@@ -3142,7 +3228,7 @@
       </p:sp>
       <p:sp>
         <p:nvSpPr>
-          <p:cNvPr id="1438379311" name="Date Placeholder 3"/>
+          <p:cNvPr id="1758663440" name="Date Placeholder 3"/>
           <p:cNvSpPr>
             <a:spLocks noGrp="1"/>
           </p:cNvSpPr>
@@ -3168,7 +3254,7 @@
       </p:sp>
       <p:sp>
         <p:nvSpPr>
-          <p:cNvPr id="1880075502" name="Footer Placeholder 4"/>
+          <p:cNvPr id="622187968" name="Footer Placeholder 4"/>
           <p:cNvSpPr>
             <a:spLocks noGrp="1"/>
           </p:cNvSpPr>
@@ -3219,7 +3305,7 @@
       </p:grpSpPr>
       <p:sp>
         <p:nvSpPr>
-          <p:cNvPr id="768294928" name="Flowchart: Process 3"/>
+          <p:cNvPr id="767744035" name="Flowchart: Process 3"/>
           <p:cNvSpPr/>
           <p:nvPr userDrawn="1"/>
         </p:nvSpPr>
@@ -3267,7 +3353,7 @@
       </p:sp>
       <p:sp>
         <p:nvSpPr>
-          <p:cNvPr id="436998707" name="Oval 4"/>
+          <p:cNvPr id="1613064519" name="Oval 4"/>
           <p:cNvSpPr/>
           <p:nvPr userDrawn="1"/>
         </p:nvSpPr>
@@ -3317,7 +3403,7 @@
       </p:sp>
       <p:sp>
         <p:nvSpPr>
-          <p:cNvPr id="1725780279" name="Oval 5"/>
+          <p:cNvPr id="342244630" name="Oval 5"/>
           <p:cNvSpPr/>
           <p:nvPr userDrawn="1"/>
         </p:nvSpPr>
@@ -3370,7 +3456,7 @@
       </p:sp>
       <p:sp>
         <p:nvSpPr>
-          <p:cNvPr id="2035796251" name="Oval 6"/>
+          <p:cNvPr id="1365484202" name="Oval 6"/>
           <p:cNvSpPr/>
           <p:nvPr userDrawn="1"/>
         </p:nvSpPr>
@@ -3420,7 +3506,7 @@
       </p:sp>
       <p:sp>
         <p:nvSpPr>
-          <p:cNvPr id="1670377052" name="Oval 7"/>
+          <p:cNvPr id="871014732" name="Oval 7"/>
           <p:cNvSpPr/>
           <p:nvPr userDrawn="1"/>
         </p:nvSpPr>
@@ -3476,7 +3562,7 @@
       </p:sp>
       <p:sp>
         <p:nvSpPr>
-          <p:cNvPr id="1181196665" name="Text Placeholder 10"/>
+          <p:cNvPr id="838338558" name="Text Placeholder 10"/>
           <p:cNvSpPr>
             <a:spLocks noGrp="1"/>
           </p:cNvSpPr>
@@ -3520,7 +3606,7 @@
       </p:sp>
       <p:sp>
         <p:nvSpPr>
-          <p:cNvPr id="1867716098" name="Text Placeholder 10"/>
+          <p:cNvPr id="751784373" name="Text Placeholder 10"/>
           <p:cNvSpPr>
             <a:spLocks noGrp="1"/>
           </p:cNvSpPr>
@@ -3564,7 +3650,7 @@
       </p:sp>
       <p:sp>
         <p:nvSpPr>
-          <p:cNvPr id="1445273665" name="Text Placeholder 10"/>
+          <p:cNvPr id="1473335670" name="Text Placeholder 10"/>
           <p:cNvSpPr>
             <a:spLocks noGrp="1"/>
           </p:cNvSpPr>
@@ -3608,7 +3694,7 @@
       </p:sp>
       <p:sp>
         <p:nvSpPr>
-          <p:cNvPr id="1232006846" name="Text Placeholder 10"/>
+          <p:cNvPr id="238638101" name="Text Placeholder 10"/>
           <p:cNvSpPr>
             <a:spLocks noGrp="1"/>
           </p:cNvSpPr>
@@ -3677,7 +3763,7 @@
       </p:grpSpPr>
       <p:sp>
         <p:nvSpPr>
-          <p:cNvPr id="1007824164" name="Flowchart: Process 3"/>
+          <p:cNvPr id="1744819016" name="Flowchart: Process 3"/>
           <p:cNvSpPr/>
           <p:nvPr userDrawn="1"/>
         </p:nvSpPr>
@@ -3725,7 +3811,7 @@
       </p:sp>
       <p:sp>
         <p:nvSpPr>
-          <p:cNvPr id="973960237" name="Oval 6"/>
+          <p:cNvPr id="510239537" name="Oval 6"/>
           <p:cNvSpPr/>
           <p:nvPr userDrawn="1"/>
         </p:nvSpPr>
@@ -3775,7 +3861,7 @@
       </p:sp>
       <p:sp>
         <p:nvSpPr>
-          <p:cNvPr id="585240586" name="Oval 7"/>
+          <p:cNvPr id="1643267105" name="Oval 7"/>
           <p:cNvSpPr/>
           <p:nvPr userDrawn="1"/>
         </p:nvSpPr>
@@ -3831,7 +3917,7 @@
       </p:sp>
       <p:sp>
         <p:nvSpPr>
-          <p:cNvPr id="1224409385" name="Text Placeholder 10"/>
+          <p:cNvPr id="1740061883" name="Text Placeholder 10"/>
           <p:cNvSpPr>
             <a:spLocks noGrp="1"/>
           </p:cNvSpPr>
@@ -3875,7 +3961,7 @@
       </p:sp>
       <p:sp>
         <p:nvSpPr>
-          <p:cNvPr id="288334778" name="Text Placeholder 10"/>
+          <p:cNvPr id="1438865174" name="Text Placeholder 10"/>
           <p:cNvSpPr>
             <a:spLocks noGrp="1"/>
           </p:cNvSpPr>
@@ -3919,7 +4005,7 @@
       </p:sp>
       <p:sp>
         <p:nvSpPr>
-          <p:cNvPr id="908442974" name="Date Placeholder 1"/>
+          <p:cNvPr id="926663481" name="Date Placeholder 1"/>
           <p:cNvSpPr>
             <a:spLocks noGrp="1"/>
           </p:cNvSpPr>
@@ -3945,7 +4031,7 @@
       </p:sp>
       <p:sp>
         <p:nvSpPr>
-          <p:cNvPr id="410413662" name="Footer Placeholder 2"/>
+          <p:cNvPr id="281755880" name="Footer Placeholder 2"/>
           <p:cNvSpPr>
             <a:spLocks noGrp="1"/>
           </p:cNvSpPr>
@@ -3996,7 +4082,7 @@
       </p:grpSpPr>
       <p:sp>
         <p:nvSpPr>
-          <p:cNvPr id="285146041" name="Flowchart: Process 3"/>
+          <p:cNvPr id="1868544458" name="Flowchart: Process 3"/>
           <p:cNvSpPr/>
           <p:nvPr userDrawn="1"/>
         </p:nvSpPr>
@@ -4044,7 +4130,7 @@
       </p:sp>
       <p:sp>
         <p:nvSpPr>
-          <p:cNvPr id="502212299" name="Oval 5"/>
+          <p:cNvPr id="1901438091" name="Oval 5"/>
           <p:cNvSpPr/>
           <p:nvPr userDrawn="1"/>
         </p:nvSpPr>
@@ -4097,7 +4183,7 @@
       </p:sp>
       <p:sp>
         <p:nvSpPr>
-          <p:cNvPr id="150470026" name="Oval 6"/>
+          <p:cNvPr id="351378516" name="Oval 6"/>
           <p:cNvSpPr/>
           <p:nvPr userDrawn="1"/>
         </p:nvSpPr>
@@ -4147,7 +4233,7 @@
       </p:sp>
       <p:sp>
         <p:nvSpPr>
-          <p:cNvPr id="1530783241" name="Oval 7"/>
+          <p:cNvPr id="2053249754" name="Oval 7"/>
           <p:cNvSpPr/>
           <p:nvPr userDrawn="1"/>
         </p:nvSpPr>
@@ -4203,7 +4289,7 @@
       </p:sp>
       <p:sp>
         <p:nvSpPr>
-          <p:cNvPr id="317257375" name="Text Placeholder 10"/>
+          <p:cNvPr id="987988973" name="Text Placeholder 10"/>
           <p:cNvSpPr>
             <a:spLocks noGrp="1"/>
           </p:cNvSpPr>
@@ -4247,7 +4333,7 @@
       </p:sp>
       <p:sp>
         <p:nvSpPr>
-          <p:cNvPr id="1974104989" name="Text Placeholder 10"/>
+          <p:cNvPr id="502491561" name="Text Placeholder 10"/>
           <p:cNvSpPr>
             <a:spLocks noGrp="1"/>
           </p:cNvSpPr>
@@ -4291,7 +4377,7 @@
       </p:sp>
       <p:sp>
         <p:nvSpPr>
-          <p:cNvPr id="1656953126" name="Text Placeholder 10"/>
+          <p:cNvPr id="1734768169" name="Text Placeholder 10"/>
           <p:cNvSpPr>
             <a:spLocks noGrp="1"/>
           </p:cNvSpPr>
@@ -4335,7 +4421,7 @@
       </p:sp>
       <p:sp>
         <p:nvSpPr>
-          <p:cNvPr id="1892085708" name="Date Placeholder 1"/>
+          <p:cNvPr id="986710089" name="Date Placeholder 1"/>
           <p:cNvSpPr>
             <a:spLocks noGrp="1"/>
           </p:cNvSpPr>
@@ -4361,7 +4447,7 @@
       </p:sp>
       <p:sp>
         <p:nvSpPr>
-          <p:cNvPr id="741999011" name="Footer Placeholder 2"/>
+          <p:cNvPr id="1492487133" name="Footer Placeholder 2"/>
           <p:cNvSpPr>
             <a:spLocks noGrp="1"/>
           </p:cNvSpPr>
@@ -4412,7 +4498,7 @@
       </p:grpSpPr>
       <p:sp>
         <p:nvSpPr>
-          <p:cNvPr id="91231087" name="Flowchart: Process 3"/>
+          <p:cNvPr id="1108620654" name="Flowchart: Process 3"/>
           <p:cNvSpPr/>
           <p:nvPr userDrawn="1"/>
         </p:nvSpPr>
@@ -4460,7 +4546,7 @@
       </p:sp>
       <p:sp>
         <p:nvSpPr>
-          <p:cNvPr id="1408636225" name="Oval 4"/>
+          <p:cNvPr id="784195676" name="Oval 4"/>
           <p:cNvSpPr/>
           <p:nvPr userDrawn="1"/>
         </p:nvSpPr>
@@ -4510,7 +4596,7 @@
       </p:sp>
       <p:sp>
         <p:nvSpPr>
-          <p:cNvPr id="1387139711" name="Oval 5"/>
+          <p:cNvPr id="1530696461" name="Oval 5"/>
           <p:cNvSpPr/>
           <p:nvPr userDrawn="1"/>
         </p:nvSpPr>
@@ -4563,7 +4649,7 @@
       </p:sp>
       <p:sp>
         <p:nvSpPr>
-          <p:cNvPr id="986867570" name="Oval 6"/>
+          <p:cNvPr id="2004434033" name="Oval 6"/>
           <p:cNvSpPr/>
           <p:nvPr userDrawn="1"/>
         </p:nvSpPr>
@@ -4613,7 +4699,7 @@
       </p:sp>
       <p:sp>
         <p:nvSpPr>
-          <p:cNvPr id="1163505887" name="Oval 7"/>
+          <p:cNvPr id="1186588558" name="Oval 7"/>
           <p:cNvSpPr/>
           <p:nvPr userDrawn="1"/>
         </p:nvSpPr>
@@ -4669,7 +4755,7 @@
       </p:sp>
       <p:sp>
         <p:nvSpPr>
-          <p:cNvPr id="2048336365" name="Text Placeholder 10"/>
+          <p:cNvPr id="376991416" name="Text Placeholder 10"/>
           <p:cNvSpPr>
             <a:spLocks noGrp="1"/>
           </p:cNvSpPr>
@@ -4713,7 +4799,7 @@
       </p:sp>
       <p:sp>
         <p:nvSpPr>
-          <p:cNvPr id="495169292" name="Text Placeholder 10"/>
+          <p:cNvPr id="36762646" name="Text Placeholder 10"/>
           <p:cNvSpPr>
             <a:spLocks noGrp="1"/>
           </p:cNvSpPr>
@@ -4757,7 +4843,7 @@
       </p:sp>
       <p:sp>
         <p:nvSpPr>
-          <p:cNvPr id="1609124423" name="Text Placeholder 10"/>
+          <p:cNvPr id="1028215133" name="Text Placeholder 10"/>
           <p:cNvSpPr>
             <a:spLocks noGrp="1"/>
           </p:cNvSpPr>
@@ -4801,7 +4887,7 @@
       </p:sp>
       <p:sp>
         <p:nvSpPr>
-          <p:cNvPr id="1870673753" name="Text Placeholder 10"/>
+          <p:cNvPr id="1507394381" name="Text Placeholder 10"/>
           <p:cNvSpPr>
             <a:spLocks noGrp="1"/>
           </p:cNvSpPr>
@@ -4845,7 +4931,7 @@
       </p:sp>
       <p:sp>
         <p:nvSpPr>
-          <p:cNvPr id="1127190279" name="Date Placeholder 1"/>
+          <p:cNvPr id="1835865701" name="Date Placeholder 1"/>
           <p:cNvSpPr>
             <a:spLocks noGrp="1"/>
           </p:cNvSpPr>
@@ -4871,7 +4957,7 @@
       </p:sp>
       <p:sp>
         <p:nvSpPr>
-          <p:cNvPr id="1508195192" name="Footer Placeholder 2"/>
+          <p:cNvPr id="668718885" name="Footer Placeholder 2"/>
           <p:cNvSpPr>
             <a:spLocks noGrp="1"/>
           </p:cNvSpPr>
@@ -4922,7 +5008,7 @@
       </p:grpSpPr>
       <p:sp>
         <p:nvSpPr>
-          <p:cNvPr id="109084070" name="Flowchart: Process 3"/>
+          <p:cNvPr id="2000732522" name="Flowchart: Process 3"/>
           <p:cNvSpPr/>
           <p:nvPr userDrawn="1"/>
         </p:nvSpPr>
@@ -4970,7 +5056,7 @@
       </p:sp>
       <p:sp>
         <p:nvSpPr>
-          <p:cNvPr id="887738388" name="Oval 4"/>
+          <p:cNvPr id="1358684638" name="Oval 4"/>
           <p:cNvSpPr/>
           <p:nvPr userDrawn="1"/>
         </p:nvSpPr>
@@ -5023,7 +5109,7 @@
       </p:sp>
       <p:sp>
         <p:nvSpPr>
-          <p:cNvPr id="557574538" name="Oval 5"/>
+          <p:cNvPr id="254705783" name="Oval 5"/>
           <p:cNvSpPr/>
           <p:nvPr userDrawn="1"/>
         </p:nvSpPr>
@@ -5076,7 +5162,7 @@
       </p:sp>
       <p:sp>
         <p:nvSpPr>
-          <p:cNvPr id="1496789796" name="Oval 6"/>
+          <p:cNvPr id="967230060" name="Oval 6"/>
           <p:cNvSpPr/>
           <p:nvPr userDrawn="1"/>
         </p:nvSpPr>
@@ -5126,7 +5212,7 @@
       </p:sp>
       <p:sp>
         <p:nvSpPr>
-          <p:cNvPr id="79713864" name="Oval 7"/>
+          <p:cNvPr id="1595240578" name="Oval 7"/>
           <p:cNvSpPr/>
           <p:nvPr userDrawn="1"/>
         </p:nvSpPr>
@@ -5182,7 +5268,7 @@
       </p:sp>
       <p:sp>
         <p:nvSpPr>
-          <p:cNvPr id="62406848" name="Oval 15"/>
+          <p:cNvPr id="1575447669" name="Oval 15"/>
           <p:cNvSpPr/>
           <p:nvPr userDrawn="1"/>
         </p:nvSpPr>
@@ -5235,7 +5321,7 @@
       </p:sp>
       <p:sp>
         <p:nvSpPr>
-          <p:cNvPr id="1604780027" name="Text Placeholder 10"/>
+          <p:cNvPr id="1969857260" name="Text Placeholder 10"/>
           <p:cNvSpPr>
             <a:spLocks noGrp="1"/>
           </p:cNvSpPr>
@@ -5279,7 +5365,7 @@
       </p:sp>
       <p:sp>
         <p:nvSpPr>
-          <p:cNvPr id="190856291" name="Text Placeholder 10"/>
+          <p:cNvPr id="1643062015" name="Text Placeholder 10"/>
           <p:cNvSpPr>
             <a:spLocks noGrp="1"/>
           </p:cNvSpPr>
@@ -5323,7 +5409,7 @@
       </p:sp>
       <p:sp>
         <p:nvSpPr>
-          <p:cNvPr id="430594149" name="Text Placeholder 10"/>
+          <p:cNvPr id="786443118" name="Text Placeholder 10"/>
           <p:cNvSpPr>
             <a:spLocks noGrp="1"/>
           </p:cNvSpPr>
@@ -5367,7 +5453,7 @@
       </p:sp>
       <p:sp>
         <p:nvSpPr>
-          <p:cNvPr id="862453738" name="Text Placeholder 10"/>
+          <p:cNvPr id="156498736" name="Text Placeholder 10"/>
           <p:cNvSpPr>
             <a:spLocks noGrp="1"/>
           </p:cNvSpPr>
@@ -5411,7 +5497,7 @@
       </p:sp>
       <p:sp>
         <p:nvSpPr>
-          <p:cNvPr id="2146566659" name="Text Placeholder 10"/>
+          <p:cNvPr id="1402674460" name="Text Placeholder 10"/>
           <p:cNvSpPr>
             <a:spLocks noGrp="1"/>
           </p:cNvSpPr>
@@ -5455,7 +5541,7 @@
       </p:sp>
       <p:sp>
         <p:nvSpPr>
-          <p:cNvPr id="1479699765" name="Date Placeholder 1"/>
+          <p:cNvPr id="673886219" name="Date Placeholder 1"/>
           <p:cNvSpPr>
             <a:spLocks noGrp="1"/>
           </p:cNvSpPr>
@@ -5481,7 +5567,7 @@
       </p:sp>
       <p:sp>
         <p:nvSpPr>
-          <p:cNvPr id="733124504" name="Footer Placeholder 2"/>
+          <p:cNvPr id="269920581" name="Footer Placeholder 2"/>
           <p:cNvSpPr>
             <a:spLocks noGrp="1"/>
           </p:cNvSpPr>
@@ -5532,7 +5618,7 @@
       </p:grpSpPr>
       <p:sp>
         <p:nvSpPr>
-          <p:cNvPr id="480021644" name="Flowchart: Process 3"/>
+          <p:cNvPr id="315566534" name="Flowchart: Process 3"/>
           <p:cNvSpPr/>
           <p:nvPr userDrawn="1"/>
         </p:nvSpPr>
@@ -5580,7 +5666,7 @@
       </p:sp>
       <p:sp>
         <p:nvSpPr>
-          <p:cNvPr id="605105254" name="Oval 4"/>
+          <p:cNvPr id="1730270553" name="Oval 4"/>
           <p:cNvSpPr/>
           <p:nvPr userDrawn="1"/>
         </p:nvSpPr>
@@ -5633,7 +5719,7 @@
       </p:sp>
       <p:sp>
         <p:nvSpPr>
-          <p:cNvPr id="1550292528" name="Oval 5"/>
+          <p:cNvPr id="565079542" name="Oval 5"/>
           <p:cNvSpPr/>
           <p:nvPr userDrawn="1"/>
         </p:nvSpPr>
@@ -5686,7 +5772,7 @@
       </p:sp>
       <p:sp>
         <p:nvSpPr>
-          <p:cNvPr id="1433497146" name="Oval 6"/>
+          <p:cNvPr id="414533518" name="Oval 6"/>
           <p:cNvSpPr/>
           <p:nvPr userDrawn="1"/>
         </p:nvSpPr>
@@ -5736,7 +5822,7 @@
       </p:sp>
       <p:sp>
         <p:nvSpPr>
-          <p:cNvPr id="2120337401" name="Oval 7"/>
+          <p:cNvPr id="1016683686" name="Oval 7"/>
           <p:cNvSpPr/>
           <p:nvPr userDrawn="1"/>
         </p:nvSpPr>
@@ -5792,7 +5878,7 @@
       </p:sp>
       <p:sp>
         <p:nvSpPr>
-          <p:cNvPr id="887236807" name="Oval 15"/>
+          <p:cNvPr id="766481846" name="Oval 15"/>
           <p:cNvSpPr/>
           <p:nvPr userDrawn="1"/>
         </p:nvSpPr>
@@ -5845,7 +5931,7 @@
       </p:sp>
       <p:sp>
         <p:nvSpPr>
-          <p:cNvPr id="1824857481" name="Text Placeholder 10"/>
+          <p:cNvPr id="120499520" name="Text Placeholder 10"/>
           <p:cNvSpPr>
             <a:spLocks noGrp="1"/>
           </p:cNvSpPr>
@@ -5889,7 +5975,7 @@
       </p:sp>
       <p:sp>
         <p:nvSpPr>
-          <p:cNvPr id="314202253" name="Oval 13"/>
+          <p:cNvPr id="1886996940" name="Oval 13"/>
           <p:cNvSpPr/>
           <p:nvPr userDrawn="1"/>
         </p:nvSpPr>
@@ -5939,7 +6025,7 @@
       </p:sp>
       <p:sp>
         <p:nvSpPr>
-          <p:cNvPr id="99920288" name="Text Placeholder 10"/>
+          <p:cNvPr id="1996514232" name="Text Placeholder 10"/>
           <p:cNvSpPr>
             <a:spLocks noGrp="1"/>
           </p:cNvSpPr>
@@ -5983,7 +6069,7 @@
       </p:sp>
       <p:sp>
         <p:nvSpPr>
-          <p:cNvPr id="513641775" name="Text Placeholder 10"/>
+          <p:cNvPr id="1930052930" name="Text Placeholder 10"/>
           <p:cNvSpPr>
             <a:spLocks noGrp="1"/>
           </p:cNvSpPr>
@@ -6027,7 +6113,7 @@
       </p:sp>
       <p:sp>
         <p:nvSpPr>
-          <p:cNvPr id="1212190085" name="Text Placeholder 10"/>
+          <p:cNvPr id="1637342780" name="Text Placeholder 10"/>
           <p:cNvSpPr>
             <a:spLocks noGrp="1"/>
           </p:cNvSpPr>
@@ -6071,7 +6157,7 @@
       </p:sp>
       <p:sp>
         <p:nvSpPr>
-          <p:cNvPr id="1842616207" name="Text Placeholder 10"/>
+          <p:cNvPr id="205581260" name="Text Placeholder 10"/>
           <p:cNvSpPr>
             <a:spLocks noGrp="1"/>
           </p:cNvSpPr>
@@ -6115,7 +6201,7 @@
       </p:sp>
       <p:sp>
         <p:nvSpPr>
-          <p:cNvPr id="398447504" name="Text Placeholder 10"/>
+          <p:cNvPr id="510955897" name="Text Placeholder 10"/>
           <p:cNvSpPr>
             <a:spLocks noGrp="1"/>
           </p:cNvSpPr>
@@ -6159,7 +6245,7 @@
       </p:sp>
       <p:sp>
         <p:nvSpPr>
-          <p:cNvPr id="2072109217" name="Date Placeholder 1"/>
+          <p:cNvPr id="1209245085" name="Date Placeholder 1"/>
           <p:cNvSpPr>
             <a:spLocks noGrp="1"/>
           </p:cNvSpPr>
@@ -6185,7 +6271,7 @@
       </p:sp>
       <p:sp>
         <p:nvSpPr>
-          <p:cNvPr id="2078568388" name="Footer Placeholder 2"/>
+          <p:cNvPr id="529029504" name="Footer Placeholder 2"/>
           <p:cNvSpPr>
             <a:spLocks noGrp="1"/>
           </p:cNvSpPr>
@@ -6236,7 +6322,7 @@
       </p:grpSpPr>
       <p:sp>
         <p:nvSpPr>
-          <p:cNvPr id="1954452872" name="Picture Placeholder 8"/>
+          <p:cNvPr id="172505272" name="Picture Placeholder 8"/>
           <p:cNvSpPr>
             <a:spLocks noGrp="1"/>
           </p:cNvSpPr>
@@ -6266,7 +6352,7 @@
       </p:sp>
       <p:sp>
         <p:nvSpPr>
-          <p:cNvPr id="257286178" name="Picture Placeholder 12"/>
+          <p:cNvPr id="254198106" name="Picture Placeholder 12"/>
           <p:cNvSpPr>
             <a:spLocks noGrp="1"/>
           </p:cNvSpPr>
@@ -6312,7 +6398,7 @@
       </p:sp>
       <p:sp>
         <p:nvSpPr>
-          <p:cNvPr id="1380750888" name="Title 1"/>
+          <p:cNvPr id="348901921" name="Title 1"/>
           <p:cNvSpPr>
             <a:spLocks noGrp="1"/>
           </p:cNvSpPr>
@@ -6355,7 +6441,7 @@
       </p:sp>
       <p:sp>
         <p:nvSpPr>
-          <p:cNvPr id="662824441" name="Subtitle 2"/>
+          <p:cNvPr id="1645691461" name="Subtitle 2"/>
           <p:cNvSpPr>
             <a:spLocks noGrp="1"/>
           </p:cNvSpPr>
@@ -6431,7 +6517,7 @@
       </p:sp>
       <p:sp>
         <p:nvSpPr>
-          <p:cNvPr id="839862898" name="Date Placeholder 3"/>
+          <p:cNvPr id="1575188757" name="Date Placeholder 3"/>
           <p:cNvSpPr>
             <a:spLocks noGrp="1"/>
           </p:cNvSpPr>
@@ -6457,7 +6543,7 @@
       </p:sp>
       <p:sp>
         <p:nvSpPr>
-          <p:cNvPr id="223209648" name="Footer Placeholder 4"/>
+          <p:cNvPr id="814388525" name="Footer Placeholder 4"/>
           <p:cNvSpPr>
             <a:spLocks noGrp="1"/>
           </p:cNvSpPr>
@@ -6508,7 +6594,7 @@
       </p:grpSpPr>
       <p:sp>
         <p:nvSpPr>
-          <p:cNvPr id="1005822851" name="Title 1"/>
+          <p:cNvPr id="609230501" name="Title 1"/>
           <p:cNvSpPr>
             <a:spLocks noGrp="1"/>
           </p:cNvSpPr>
@@ -6551,7 +6637,7 @@
       </p:sp>
       <p:sp>
         <p:nvSpPr>
-          <p:cNvPr id="1232437629" name="Content Placeholder 2"/>
+          <p:cNvPr id="2106548201" name="Content Placeholder 2"/>
           <p:cNvSpPr>
             <a:spLocks noGrp="1"/>
           </p:cNvSpPr>
@@ -6666,7 +6752,7 @@
       </p:sp>
       <p:sp>
         <p:nvSpPr>
-          <p:cNvPr id="841506769" name="Picture Placeholder 8"/>
+          <p:cNvPr id="194066824" name="Picture Placeholder 8"/>
           <p:cNvSpPr>
             <a:spLocks noGrp="1"/>
           </p:cNvSpPr>
@@ -6696,7 +6782,7 @@
       </p:sp>
       <p:sp>
         <p:nvSpPr>
-          <p:cNvPr id="661630027" name="Date Placeholder 3"/>
+          <p:cNvPr id="1396837711" name="Date Placeholder 3"/>
           <p:cNvSpPr>
             <a:spLocks noGrp="1"/>
           </p:cNvSpPr>
@@ -6722,7 +6808,7 @@
       </p:sp>
       <p:sp>
         <p:nvSpPr>
-          <p:cNvPr id="1525094650" name="Footer Placeholder 4"/>
+          <p:cNvPr id="699442476" name="Footer Placeholder 4"/>
           <p:cNvSpPr>
             <a:spLocks noGrp="1"/>
           </p:cNvSpPr>
@@ -6773,7 +6859,7 @@
       </p:grpSpPr>
       <p:sp>
         <p:nvSpPr>
-          <p:cNvPr id="717452687" name="Title 1"/>
+          <p:cNvPr id="1451418647" name="Title 1"/>
           <p:cNvSpPr>
             <a:spLocks noGrp="1"/>
           </p:cNvSpPr>
@@ -6823,7 +6909,7 @@
       </p:sp>
       <p:sp>
         <p:nvSpPr>
-          <p:cNvPr id="1333455975" name="Content Placeholder 2"/>
+          <p:cNvPr id="1167186587" name="Content Placeholder 2"/>
           <p:cNvSpPr>
             <a:spLocks noGrp="1"/>
           </p:cNvSpPr>
@@ -6940,7 +7026,7 @@
       </p:sp>
       <p:sp>
         <p:nvSpPr>
-          <p:cNvPr id="790953794" name="Content Placeholder 3"/>
+          <p:cNvPr id="2116886634" name="Content Placeholder 3"/>
           <p:cNvSpPr>
             <a:spLocks noGrp="1"/>
           </p:cNvSpPr>
@@ -7057,7 +7143,7 @@
       </p:sp>
       <p:sp>
         <p:nvSpPr>
-          <p:cNvPr id="2012513737" name="Date Placeholder 1"/>
+          <p:cNvPr id="659513077" name="Date Placeholder 1"/>
           <p:cNvSpPr>
             <a:spLocks noGrp="1"/>
           </p:cNvSpPr>
@@ -7083,7 +7169,7 @@
       </p:sp>
       <p:sp>
         <p:nvSpPr>
-          <p:cNvPr id="209426979" name="Footer Placeholder 2"/>
+          <p:cNvPr id="1418194924" name="Footer Placeholder 2"/>
           <p:cNvSpPr>
             <a:spLocks noGrp="1"/>
           </p:cNvSpPr>
@@ -7143,7 +7229,7 @@
       </p:grpSpPr>
       <p:pic>
         <p:nvPicPr>
-          <p:cNvPr id="475707388" name="Picture 6"/>
+          <p:cNvPr id="1590564672" name="Picture 6"/>
           <p:cNvPicPr>
             <a:picLocks noChangeAspect="1"/>
           </p:cNvPicPr>
@@ -7165,7 +7251,7 @@
       </p:pic>
       <p:sp>
         <p:nvSpPr>
-          <p:cNvPr id="617090829" name="Slide Number Placeholder 1"/>
+          <p:cNvPr id="828352907" name="Slide Number Placeholder 1"/>
           <p:cNvSpPr txBox="1"/>
           <p:nvPr userDrawn="1"/>
         </p:nvSpPr>
@@ -7299,7 +7385,7 @@
       </p:sp>
       <p:pic>
         <p:nvPicPr>
-          <p:cNvPr id="360536395" name="Graphic 8"/>
+          <p:cNvPr id="762614433" name="Graphic 8"/>
           <p:cNvPicPr>
             <a:picLocks noChangeAspect="1"/>
           </p:cNvPicPr>
@@ -7327,7 +7413,7 @@
       </p:pic>
       <p:sp>
         <p:nvSpPr>
-          <p:cNvPr id="343353425" name="Date Placeholder 12"/>
+          <p:cNvPr id="2076818216" name="Date Placeholder 12"/>
           <p:cNvSpPr>
             <a:spLocks noGrp="1"/>
           </p:cNvSpPr>
@@ -7371,7 +7457,7 @@
       </p:sp>
       <p:sp>
         <p:nvSpPr>
-          <p:cNvPr id="1546033386" name="Footer Placeholder 13"/>
+          <p:cNvPr id="1917813245" name="Footer Placeholder 13"/>
           <p:cNvSpPr>
             <a:spLocks noGrp="1"/>
           </p:cNvSpPr>
@@ -7736,7 +7822,7 @@
       </p:grpSpPr>
       <p:sp>
         <p:nvSpPr>
-          <p:cNvPr id="2142435203" name="Slide Number Placeholder 1"/>
+          <p:cNvPr id="1620257617" name="Slide Number Placeholder 1"/>
           <p:cNvSpPr txBox="1"/>
           <p:nvPr userDrawn="1"/>
         </p:nvSpPr>
@@ -7870,7 +7956,7 @@
       </p:sp>
       <p:pic>
         <p:nvPicPr>
-          <p:cNvPr id="1570249815" name="Graphic 8"/>
+          <p:cNvPr id="1934406607" name="Graphic 8"/>
           <p:cNvPicPr>
             <a:picLocks noChangeAspect="1"/>
           </p:cNvPicPr>
@@ -7892,7 +7978,7 @@
       </p:pic>
       <p:sp>
         <p:nvSpPr>
-          <p:cNvPr id="321928626" name="Footer Placeholder 13"/>
+          <p:cNvPr id="465760991" name="Footer Placeholder 13"/>
           <p:cNvSpPr>
             <a:spLocks noGrp="1"/>
           </p:cNvSpPr>
@@ -7936,7 +8022,7 @@
       </p:sp>
       <p:sp>
         <p:nvSpPr>
-          <p:cNvPr id="186637175" name="Date Placeholder 12"/>
+          <p:cNvPr id="2135624687" name="Date Placeholder 12"/>
           <p:cNvSpPr>
             <a:spLocks noGrp="1"/>
           </p:cNvSpPr>
@@ -7980,7 +8066,7 @@
       </p:sp>
       <p:pic>
         <p:nvPicPr>
-          <p:cNvPr id="2043491476" name="Picture 9"/>
+          <p:cNvPr id="1332167084" name="Picture 9"/>
           <p:cNvPicPr>
             <a:picLocks noChangeAspect="1"/>
           </p:cNvPicPr>
@@ -8315,7 +8401,7 @@
       </p:grpSpPr>
       <p:sp>
         <p:nvSpPr>
-          <p:cNvPr id="542136049" name="Title 1"/>
+          <p:cNvPr id="1319216161" name="Title 1"/>
           <p:cNvSpPr>
             <a:spLocks noGrp="1"/>
           </p:cNvSpPr>
@@ -8350,7 +8436,7 @@
       </p:sp>
       <p:sp>
         <p:nvSpPr>
-          <p:cNvPr id="1660364364" name="Subtitle 2"/>
+          <p:cNvPr id="747841938" name="Subtitle 2"/>
           <p:cNvSpPr>
             <a:spLocks noGrp="1"/>
           </p:cNvSpPr>
@@ -8423,7 +8509,7 @@
       </p:grpSpPr>
       <p:sp>
         <p:nvSpPr>
-          <p:cNvPr id="325196714" name="Title 5"/>
+          <p:cNvPr id="935845382" name="Title 5"/>
           <p:cNvSpPr>
             <a:spLocks noGrp="1"/>
           </p:cNvSpPr>
@@ -8456,7 +8542,7 @@
       </p:sp>
       <p:sp>
         <p:nvSpPr>
-          <p:cNvPr id="1424502600" name="Content Placeholder 6"/>
+          <p:cNvPr id="1820858329" name="Content Placeholder 6"/>
           <p:cNvSpPr>
             <a:spLocks noGrp="1"/>
           </p:cNvSpPr>
@@ -8491,7 +8577,7 @@
       </p:sp>
       <p:grpSp>
         <p:nvGrpSpPr>
-          <p:cNvPr id="5041598" name="Group 7"/>
+          <p:cNvPr id="324749938" name="Group 7"/>
           <p:cNvGrpSpPr/>
           <p:nvPr/>
         </p:nvGrpSpPr>
@@ -8802,7 +8888,7 @@
       </p:grpSp>
       <p:grpSp>
         <p:nvGrpSpPr>
-          <p:cNvPr id="1683365063" name="Group 27"/>
+          <p:cNvPr id="1328252323" name="Group 27"/>
           <p:cNvGrpSpPr/>
           <p:nvPr/>
         </p:nvGrpSpPr>
@@ -8927,7 +9013,7 @@
       </p:grpSp>
       <p:pic>
         <p:nvPicPr>
-          <p:cNvPr id="1140205548" name="Picture 11" descr="A picture containing text, sign, businesscard&#10;&#10;Description automatically generated"/>
+          <p:cNvPr id="159399824" name="Picture 11" descr="A picture containing text, sign, businesscard&#10;&#10;Description automatically generated"/>
           <p:cNvPicPr>
             <a:picLocks noChangeAspect="1"/>
           </p:cNvPicPr>
@@ -8949,7 +9035,7 @@
       </p:pic>
       <p:sp>
         <p:nvSpPr>
-          <p:cNvPr id="464685758" name="Footer Placeholder 9"/>
+          <p:cNvPr id="1262525244" name="Footer Placeholder 9"/>
           <p:cNvSpPr>
             <a:spLocks noGrp="1"/>
           </p:cNvSpPr>
@@ -9008,7 +9094,7 @@
       </p:grpSpPr>
       <p:sp>
         <p:nvSpPr>
-          <p:cNvPr id="2074658071" name="Title 5"/>
+          <p:cNvPr id="418408372" name="Title 5"/>
           <p:cNvSpPr>
             <a:spLocks noGrp="1"/>
           </p:cNvSpPr>
@@ -9041,7 +9127,7 @@
       </p:sp>
       <p:sp>
         <p:nvSpPr>
-          <p:cNvPr id="1701506128" name="Content Placeholder 6"/>
+          <p:cNvPr id="814137640" name="Content Placeholder 6"/>
           <p:cNvSpPr>
             <a:spLocks noGrp="1"/>
           </p:cNvSpPr>
@@ -9076,7 +9162,7 @@
       </p:sp>
       <p:grpSp>
         <p:nvGrpSpPr>
-          <p:cNvPr id="876861" name="Group 7"/>
+          <p:cNvPr id="930110781" name="Group 7"/>
           <p:cNvGrpSpPr/>
           <p:nvPr/>
         </p:nvGrpSpPr>
@@ -9387,7 +9473,7 @@
       </p:grpSp>
       <p:grpSp>
         <p:nvGrpSpPr>
-          <p:cNvPr id="251642812" name="Group 27"/>
+          <p:cNvPr id="1408244934" name="Group 27"/>
           <p:cNvGrpSpPr/>
           <p:nvPr/>
         </p:nvGrpSpPr>
@@ -9468,7 +9554,7 @@
       </p:grpSp>
       <p:pic>
         <p:nvPicPr>
-          <p:cNvPr id="1259529205" name="Picture 4"/>
+          <p:cNvPr id="426845053" name="Picture 4"/>
           <p:cNvPicPr>
             <a:picLocks noChangeAspect="1" noChangeArrowheads="1"/>
           </p:cNvPicPr>
@@ -9491,7 +9577,7 @@
       </p:pic>
       <p:pic>
         <p:nvPicPr>
-          <p:cNvPr id="194051804" name="Picture 22" descr="A picture containing text, sign, businesscard&#10;&#10;Description automatically generated"/>
+          <p:cNvPr id="431783691" name="Picture 22" descr="A picture containing text, sign, businesscard&#10;&#10;Description automatically generated"/>
           <p:cNvPicPr>
             <a:picLocks noChangeAspect="1"/>
           </p:cNvPicPr>
@@ -9513,7 +9599,7 @@
       </p:pic>
       <p:pic>
         <p:nvPicPr>
-          <p:cNvPr id="1368345902" name="Picture 20" descr="A picture containing text, sign, businesscard&#10;&#10;Description automatically generated"/>
+          <p:cNvPr id="270285675" name="Picture 20" descr="A picture containing text, sign, businesscard&#10;&#10;Description automatically generated"/>
           <p:cNvPicPr>
             <a:picLocks noChangeAspect="1"/>
           </p:cNvPicPr>
@@ -9535,7 +9621,7 @@
       </p:pic>
       <p:sp>
         <p:nvSpPr>
-          <p:cNvPr id="952676852" name="Footer Placeholder 9"/>
+          <p:cNvPr id="1379356696" name="Footer Placeholder 9"/>
           <p:cNvSpPr>
             <a:spLocks noGrp="1"/>
           </p:cNvSpPr>
@@ -9594,7 +9680,7 @@
       </p:grpSpPr>
       <p:sp>
         <p:nvSpPr>
-          <p:cNvPr id="1457931712" name="Title 5"/>
+          <p:cNvPr id="665907715" name="Title 5"/>
           <p:cNvSpPr>
             <a:spLocks noGrp="1"/>
           </p:cNvSpPr>
@@ -9627,7 +9713,7 @@
       </p:sp>
       <p:sp>
         <p:nvSpPr>
-          <p:cNvPr id="29589450" name="Content Placeholder 6"/>
+          <p:cNvPr id="1629583182" name="Content Placeholder 6"/>
           <p:cNvSpPr>
             <a:spLocks noGrp="1"/>
           </p:cNvSpPr>
@@ -9662,7 +9748,7 @@
       </p:sp>
       <p:grpSp>
         <p:nvGrpSpPr>
-          <p:cNvPr id="964725513" name="Group 7"/>
+          <p:cNvPr id="1050655834" name="Group 7"/>
           <p:cNvGrpSpPr/>
           <p:nvPr/>
         </p:nvGrpSpPr>
@@ -9973,7 +10059,7 @@
       </p:grpSp>
       <p:grpSp>
         <p:nvGrpSpPr>
-          <p:cNvPr id="1374718869" name="Group 27"/>
+          <p:cNvPr id="1892215281" name="Group 27"/>
           <p:cNvGrpSpPr/>
           <p:nvPr/>
         </p:nvGrpSpPr>
@@ -10054,7 +10140,7 @@
       </p:grpSp>
       <p:pic>
         <p:nvPicPr>
-          <p:cNvPr id="1279620117" name="Picture 4"/>
+          <p:cNvPr id="1861074400" name="Picture 4"/>
           <p:cNvPicPr>
             <a:picLocks noChangeAspect="1" noChangeArrowheads="1"/>
           </p:cNvPicPr>
@@ -10077,7 +10163,7 @@
       </p:pic>
       <p:pic>
         <p:nvPicPr>
-          <p:cNvPr id="1288454223" name="Picture 22" descr="A picture containing text, sign, businesscard&#10;&#10;Description automatically generated"/>
+          <p:cNvPr id="1603097351" name="Picture 22" descr="A picture containing text, sign, businesscard&#10;&#10;Description automatically generated"/>
           <p:cNvPicPr>
             <a:picLocks noChangeAspect="1"/>
           </p:cNvPicPr>
@@ -10099,7 +10185,7 @@
       </p:pic>
       <p:pic>
         <p:nvPicPr>
-          <p:cNvPr id="668489592" name="Picture 20" descr="A picture containing text, sign, businesscard&#10;&#10;Description automatically generated"/>
+          <p:cNvPr id="179764631" name="Picture 20" descr="A picture containing text, sign, businesscard&#10;&#10;Description automatically generated"/>
           <p:cNvPicPr>
             <a:picLocks noChangeAspect="1"/>
           </p:cNvPicPr>
@@ -10121,7 +10207,7 @@
       </p:pic>
       <p:pic>
         <p:nvPicPr>
-          <p:cNvPr id="2107386299" name="Picture 16" descr="A picture containing text, sign, businesscard"/>
+          <p:cNvPr id="1639868797" name="Picture 16" descr="A picture containing text, sign, businesscard"/>
           <p:cNvPicPr>
             <a:picLocks noChangeAspect="1"/>
           </p:cNvPicPr>
@@ -10132,7 +10218,7 @@
           <a:stretch/>
         </p:blipFill>
         <p:spPr bwMode="auto">
-          <a:xfrm rot="21258242">
+          <a:xfrm rot="21258241">
             <a:off x="5663679" y="2257624"/>
             <a:ext cx="1402020" cy="1684054"/>
           </a:xfrm>
@@ -10143,7 +10229,7 @@
       </p:pic>
       <p:sp>
         <p:nvSpPr>
-          <p:cNvPr id="1134959664" name="Footer Placeholder 9"/>
+          <p:cNvPr id="1725759094" name="Footer Placeholder 9"/>
           <p:cNvSpPr>
             <a:spLocks noGrp="1"/>
           </p:cNvSpPr>
@@ -10202,7 +10288,7 @@
       </p:grpSpPr>
       <p:sp>
         <p:nvSpPr>
-          <p:cNvPr id="2041877509" name="Title 5"/>
+          <p:cNvPr id="1418236392" name="Title 5"/>
           <p:cNvSpPr>
             <a:spLocks noGrp="1"/>
           </p:cNvSpPr>
@@ -10235,7 +10321,7 @@
       </p:sp>
       <p:sp>
         <p:nvSpPr>
-          <p:cNvPr id="1167656188" name="Content Placeholder 6"/>
+          <p:cNvPr id="851319879" name="Content Placeholder 6"/>
           <p:cNvSpPr>
             <a:spLocks noGrp="1"/>
           </p:cNvSpPr>
@@ -10270,7 +10356,7 @@
       </p:sp>
       <p:grpSp>
         <p:nvGrpSpPr>
-          <p:cNvPr id="864767248" name="Group 7"/>
+          <p:cNvPr id="1405387717" name="Group 7"/>
           <p:cNvGrpSpPr/>
           <p:nvPr/>
         </p:nvGrpSpPr>
@@ -10581,7 +10667,7 @@
       </p:grpSp>
       <p:sp>
         <p:nvSpPr>
-          <p:cNvPr id="1693321180" name="TextBox 11"/>
+          <p:cNvPr id="1963423822" name="TextBox 11"/>
           <p:cNvSpPr txBox="1"/>
           <p:nvPr/>
         </p:nvSpPr>
@@ -10642,7 +10728,7 @@
       </p:sp>
       <p:sp>
         <p:nvSpPr>
-          <p:cNvPr id="1006803634" name="TextBox 24"/>
+          <p:cNvPr id="54866206" name="TextBox 24"/>
           <p:cNvSpPr txBox="1"/>
           <p:nvPr/>
         </p:nvSpPr>
@@ -10703,7 +10789,7 @@
       </p:sp>
       <p:sp>
         <p:nvSpPr>
-          <p:cNvPr id="292628270" name="Footer Placeholder 9"/>
+          <p:cNvPr id="2043966296" name="Footer Placeholder 9"/>
           <p:cNvSpPr>
             <a:spLocks noGrp="1"/>
           </p:cNvSpPr>
@@ -10762,7 +10848,7 @@
       </p:grpSpPr>
       <p:sp>
         <p:nvSpPr>
-          <p:cNvPr id="675299055" name="Title 5"/>
+          <p:cNvPr id="1833550877" name="Title 5"/>
           <p:cNvSpPr>
             <a:spLocks noGrp="1"/>
           </p:cNvSpPr>
@@ -10795,7 +10881,7 @@
       </p:sp>
       <p:sp>
         <p:nvSpPr>
-          <p:cNvPr id="1417122120" name="Content Placeholder 6"/>
+          <p:cNvPr id="1762009216" name="Content Placeholder 6"/>
           <p:cNvSpPr>
             <a:spLocks noGrp="1"/>
           </p:cNvSpPr>
@@ -10830,7 +10916,7 @@
       </p:sp>
       <p:grpSp>
         <p:nvGrpSpPr>
-          <p:cNvPr id="231233155" name="Group 7"/>
+          <p:cNvPr id="19898086" name="Group 7"/>
           <p:cNvGrpSpPr/>
           <p:nvPr/>
         </p:nvGrpSpPr>
@@ -11141,7 +11227,7 @@
       </p:grpSp>
       <p:sp>
         <p:nvSpPr>
-          <p:cNvPr id="1715939337" name="TextBox 11"/>
+          <p:cNvPr id="118955175" name="TextBox 11"/>
           <p:cNvSpPr txBox="1"/>
           <p:nvPr/>
         </p:nvSpPr>
@@ -11189,7 +11275,7 @@
       </p:sp>
       <p:sp>
         <p:nvSpPr>
-          <p:cNvPr id="136697045" name="TextBox 24"/>
+          <p:cNvPr id="348616110" name="TextBox 24"/>
           <p:cNvSpPr txBox="1"/>
           <p:nvPr/>
         </p:nvSpPr>
@@ -11237,7 +11323,7 @@
       </p:sp>
       <p:sp>
         <p:nvSpPr>
-          <p:cNvPr id="1203153535" name="TextBox 9"/>
+          <p:cNvPr id="1665989497" name="TextBox 9"/>
           <p:cNvSpPr txBox="1"/>
           <p:nvPr/>
         </p:nvSpPr>
@@ -11285,7 +11371,7 @@
       </p:sp>
       <p:sp>
         <p:nvSpPr>
-          <p:cNvPr id="953710849" name="Left Brace 13"/>
+          <p:cNvPr id="1287754971" name="Left Brace 13"/>
           <p:cNvSpPr/>
           <p:nvPr/>
         </p:nvSpPr>
@@ -11329,7 +11415,7 @@
       </p:sp>
       <p:sp>
         <p:nvSpPr>
-          <p:cNvPr id="1691145490" name="Footer Placeholder 2"/>
+          <p:cNvPr id="738043444" name="Footer Placeholder 2"/>
           <p:cNvSpPr>
             <a:spLocks noGrp="1"/>
           </p:cNvSpPr>
@@ -11388,7 +11474,7 @@
       </p:grpSpPr>
       <p:sp>
         <p:nvSpPr>
-          <p:cNvPr id="1537954117" name="Title 1"/>
+          <p:cNvPr id="1210251119" name="Title 1"/>
           <p:cNvSpPr>
             <a:spLocks noGrp="1"/>
           </p:cNvSpPr>
@@ -11421,7 +11507,7 @@
       </p:sp>
       <p:sp>
         <p:nvSpPr>
-          <p:cNvPr id="2048508729" name="Content Placeholder 2"/>
+          <p:cNvPr id="768600051" name="Content Placeholder 2"/>
           <p:cNvSpPr>
             <a:spLocks noGrp="1"/>
           </p:cNvSpPr>
@@ -11614,7 +11700,7 @@
       </p:sp>
       <p:sp>
         <p:nvSpPr>
-          <p:cNvPr id="818559347" name="Content Placeholder 3"/>
+          <p:cNvPr id="543109226" name="Content Placeholder 3"/>
           <p:cNvSpPr>
             <a:spLocks noGrp="1"/>
           </p:cNvSpPr>
@@ -11768,7 +11854,7 @@
       </p:sp>
       <p:sp>
         <p:nvSpPr>
-          <p:cNvPr id="346073169" name="Footer Placeholder 5"/>
+          <p:cNvPr id="2027020731" name="Footer Placeholder 5"/>
           <p:cNvSpPr>
             <a:spLocks noGrp="1"/>
           </p:cNvSpPr>
@@ -11827,7 +11913,7 @@
       </p:grpSpPr>
       <p:sp>
         <p:nvSpPr>
-          <p:cNvPr id="612923243" name="Title 1"/>
+          <p:cNvPr id="1676281994" name="Title 1"/>
           <p:cNvSpPr>
             <a:spLocks noGrp="1"/>
           </p:cNvSpPr>
@@ -11860,7 +11946,7 @@
       </p:sp>
       <p:sp>
         <p:nvSpPr>
-          <p:cNvPr id="577829161" name="Content Placeholder 2"/>
+          <p:cNvPr id="1744444280" name="Content Placeholder 2"/>
           <p:cNvSpPr>
             <a:spLocks noGrp="1"/>
           </p:cNvSpPr>
@@ -11989,7 +12075,7 @@
       </p:sp>
       <p:sp>
         <p:nvSpPr>
-          <p:cNvPr id="480104970" name="Footer Placeholder 4"/>
+          <p:cNvPr id="303233260" name="Footer Placeholder 4"/>
           <p:cNvSpPr>
             <a:spLocks noGrp="1"/>
           </p:cNvSpPr>
@@ -12015,7 +12101,7 @@
       </p:sp>
       <p:pic>
         <p:nvPicPr>
-          <p:cNvPr id="939964451" name="Picture 6"/>
+          <p:cNvPr id="1974762113" name="Picture 6"/>
           <p:cNvPicPr>
             <a:picLocks noChangeAspect="1"/>
           </p:cNvPicPr>
@@ -12071,7 +12157,7 @@
       </p:grpSpPr>
       <p:sp>
         <p:nvSpPr>
-          <p:cNvPr id="1960858945" name="Title 1"/>
+          <p:cNvPr id="871351188" name="Title 1"/>
           <p:cNvSpPr>
             <a:spLocks noGrp="1"/>
           </p:cNvSpPr>
@@ -12104,7 +12190,7 @@
       </p:sp>
       <p:sp>
         <p:nvSpPr>
-          <p:cNvPr id="1325882329" name="Content Placeholder 2"/>
+          <p:cNvPr id="838560349" name="Content Placeholder 2"/>
           <p:cNvSpPr>
             <a:spLocks noGrp="1"/>
           </p:cNvSpPr>
@@ -12159,7 +12245,7 @@
       </p:sp>
       <p:sp>
         <p:nvSpPr>
-          <p:cNvPr id="175696765" name="Footer Placeholder 4"/>
+          <p:cNvPr id="404507387" name="Footer Placeholder 4"/>
           <p:cNvSpPr>
             <a:spLocks noGrp="1"/>
           </p:cNvSpPr>
@@ -12185,7 +12271,7 @@
       </p:sp>
       <p:pic>
         <p:nvPicPr>
-          <p:cNvPr id="218050099" name="Picture 6"/>
+          <p:cNvPr id="996061047" name="Picture 6"/>
           <p:cNvPicPr>
             <a:picLocks noChangeAspect="1"/>
           </p:cNvPicPr>
@@ -12241,7 +12327,7 @@
       </p:grpSpPr>
       <p:sp>
         <p:nvSpPr>
-          <p:cNvPr id="1546313666" name="Title 1"/>
+          <p:cNvPr id="931460948" name="Title 1"/>
           <p:cNvSpPr>
             <a:spLocks noGrp="1"/>
           </p:cNvSpPr>
@@ -12274,7 +12360,7 @@
       </p:sp>
       <p:sp>
         <p:nvSpPr>
-          <p:cNvPr id="1235760264" name="Content Placeholder 2"/>
+          <p:cNvPr id="1510589019" name="Content Placeholder 2"/>
           <p:cNvSpPr>
             <a:spLocks noGrp="1"/>
           </p:cNvSpPr>
@@ -12349,7 +12435,7 @@
       </p:sp>
       <p:sp>
         <p:nvSpPr>
-          <p:cNvPr id="349756116" name="Footer Placeholder 4"/>
+          <p:cNvPr id="1432693432" name="Footer Placeholder 4"/>
           <p:cNvSpPr>
             <a:spLocks noGrp="1"/>
           </p:cNvSpPr>
@@ -12375,7 +12461,7 @@
       </p:sp>
       <p:pic>
         <p:nvPicPr>
-          <p:cNvPr id="1092728126" name="Picture 6"/>
+          <p:cNvPr id="2071939616" name="Picture 6"/>
           <p:cNvPicPr>
             <a:picLocks noChangeAspect="1"/>
           </p:cNvPicPr>
@@ -12398,7 +12484,7 @@
       </p:pic>
       <p:pic>
         <p:nvPicPr>
-          <p:cNvPr id="1034543253" name="Picture 11"/>
+          <p:cNvPr id="1970898210" name="Picture 11"/>
           <p:cNvPicPr>
             <a:picLocks noChangeAspect="1"/>
           </p:cNvPicPr>
@@ -12421,7 +12507,7 @@
       </p:pic>
       <p:pic>
         <p:nvPicPr>
-          <p:cNvPr id="622963882" name="Ink 19"/>
+          <p:cNvPr id="84746109" name="Ink 19"/>
           <p:cNvPicPr/>
           <p:nvPr/>
         </p:nvPicPr>
@@ -12441,7 +12527,7 @@
       </p:pic>
       <p:grpSp>
         <p:nvGrpSpPr>
-          <p:cNvPr id="1593273107" name="Group 23"/>
+          <p:cNvPr id="1981271881" name="Group 23"/>
           <p:cNvGrpSpPr/>
           <p:nvPr/>
         </p:nvGrpSpPr>
@@ -12596,7 +12682,7 @@
       </p:grpSp>
       <p:pic>
         <p:nvPicPr>
-          <p:cNvPr id="1365102152" name="Ink 24"/>
+          <p:cNvPr id="1405408149" name="Ink 24"/>
           <p:cNvPicPr/>
           <p:nvPr/>
         </p:nvPicPr>
@@ -12616,7 +12702,7 @@
       </p:pic>
       <p:pic>
         <p:nvPicPr>
-          <p:cNvPr id="1976405916" name="Ink 25"/>
+          <p:cNvPr id="2026564233" name="Ink 25"/>
           <p:cNvPicPr/>
           <p:nvPr/>
         </p:nvPicPr>
@@ -12669,7 +12755,7 @@
       </p:grpSpPr>
       <p:sp>
         <p:nvSpPr>
-          <p:cNvPr id="467883185" name="Title 1"/>
+          <p:cNvPr id="523841834" name="Title 1"/>
           <p:cNvSpPr>
             <a:spLocks noGrp="1"/>
           </p:cNvSpPr>
@@ -12702,7 +12788,7 @@
       </p:sp>
       <p:sp>
         <p:nvSpPr>
-          <p:cNvPr id="1740710389" name="Content Placeholder 2"/>
+          <p:cNvPr id="1267141571" name="Content Placeholder 2"/>
           <p:cNvSpPr>
             <a:spLocks noGrp="1"/>
           </p:cNvSpPr>
@@ -12771,7 +12857,7 @@
       </p:sp>
       <p:sp>
         <p:nvSpPr>
-          <p:cNvPr id="881380206" name="Footer Placeholder 4"/>
+          <p:cNvPr id="1978926065" name="Footer Placeholder 4"/>
           <p:cNvSpPr>
             <a:spLocks noGrp="1"/>
           </p:cNvSpPr>
@@ -12797,7 +12883,7 @@
       </p:sp>
       <p:pic>
         <p:nvPicPr>
-          <p:cNvPr id="962209912" name="Picture 7"/>
+          <p:cNvPr id="16604804" name="Picture 7"/>
           <p:cNvPicPr>
             <a:picLocks noChangeAspect="1"/>
           </p:cNvPicPr>
@@ -12852,7 +12938,7 @@
       </p:grpSpPr>
       <p:sp>
         <p:nvSpPr>
-          <p:cNvPr id="1468411065" name="Text Placeholder 1"/>
+          <p:cNvPr id="1909147586" name="Text Placeholder 1"/>
           <p:cNvSpPr>
             <a:spLocks noGrp="1"/>
           </p:cNvSpPr>
@@ -12901,7 +12987,7 @@
       </p:sp>
       <p:sp>
         <p:nvSpPr>
-          <p:cNvPr id="708072247" name="Text Placeholder 2"/>
+          <p:cNvPr id="1979762855" name="Text Placeholder 2"/>
           <p:cNvSpPr>
             <a:spLocks noGrp="1"/>
           </p:cNvSpPr>
@@ -12950,7 +13036,7 @@
       </p:sp>
       <p:sp>
         <p:nvSpPr>
-          <p:cNvPr id="1454980422" name="Text Placeholder 3"/>
+          <p:cNvPr id="1809858591" name="Text Placeholder 3"/>
           <p:cNvSpPr>
             <a:spLocks noGrp="1"/>
           </p:cNvSpPr>
@@ -12999,7 +13085,7 @@
       </p:sp>
       <p:sp>
         <p:nvSpPr>
-          <p:cNvPr id="1304831881" name="Footer Placeholder 4"/>
+          <p:cNvPr id="1999657195" name="Footer Placeholder 4"/>
           <p:cNvSpPr>
             <a:spLocks noGrp="1"/>
           </p:cNvSpPr>
@@ -13058,7 +13144,7 @@
       </p:grpSpPr>
       <p:sp>
         <p:nvSpPr>
-          <p:cNvPr id="254734278" name="Title 1"/>
+          <p:cNvPr id="23813630" name="Title 1"/>
           <p:cNvSpPr>
             <a:spLocks noGrp="1"/>
           </p:cNvSpPr>
@@ -13091,7 +13177,7 @@
       </p:sp>
       <p:sp>
         <p:nvSpPr>
-          <p:cNvPr id="1428765720" name="Content Placeholder 2"/>
+          <p:cNvPr id="452158762" name="Content Placeholder 2"/>
           <p:cNvSpPr>
             <a:spLocks noGrp="1"/>
           </p:cNvSpPr>
@@ -13476,7 +13562,7 @@
       </p:sp>
       <p:sp>
         <p:nvSpPr>
-          <p:cNvPr id="1971270658" name="Footer Placeholder 4"/>
+          <p:cNvPr id="947850883" name="Footer Placeholder 4"/>
           <p:cNvSpPr>
             <a:spLocks noGrp="1"/>
           </p:cNvSpPr>
@@ -13502,7 +13588,7 @@
       </p:sp>
       <p:pic>
         <p:nvPicPr>
-          <p:cNvPr id="1691799939" name="Picture 11"/>
+          <p:cNvPr id="271617419" name="Picture 11"/>
           <p:cNvPicPr>
             <a:picLocks noChangeAspect="1"/>
           </p:cNvPicPr>
@@ -13525,7 +13611,7 @@
       </p:pic>
       <p:pic>
         <p:nvPicPr>
-          <p:cNvPr id="1072957488" name="Picture 13"/>
+          <p:cNvPr id="219790849" name="Picture 13"/>
           <p:cNvPicPr>
             <a:picLocks noChangeAspect="1"/>
           </p:cNvPicPr>
@@ -13581,7 +13667,7 @@
       </p:grpSpPr>
       <p:sp>
         <p:nvSpPr>
-          <p:cNvPr id="405098942" name="Title 1"/>
+          <p:cNvPr id="314804893" name="Title 1"/>
           <p:cNvSpPr>
             <a:spLocks noGrp="1"/>
           </p:cNvSpPr>
@@ -13614,7 +13700,7 @@
       </p:sp>
       <p:sp>
         <p:nvSpPr>
-          <p:cNvPr id="1241058136" name="Content Placeholder 2"/>
+          <p:cNvPr id="1206621068" name="Content Placeholder 2"/>
           <p:cNvSpPr>
             <a:spLocks noGrp="1"/>
           </p:cNvSpPr>
@@ -13741,7 +13827,7 @@
       </p:sp>
       <p:sp>
         <p:nvSpPr>
-          <p:cNvPr id="1647553138" name="Footer Placeholder 4"/>
+          <p:cNvPr id="2131457128" name="Footer Placeholder 4"/>
           <p:cNvSpPr>
             <a:spLocks noGrp="1"/>
           </p:cNvSpPr>
@@ -13767,7 +13853,7 @@
       </p:sp>
       <p:grpSp>
         <p:nvGrpSpPr>
-          <p:cNvPr id="768921305" name="Group 5"/>
+          <p:cNvPr id="1403959932" name="Group 5"/>
           <p:cNvGrpSpPr/>
           <p:nvPr/>
         </p:nvGrpSpPr>
@@ -14003,7 +14089,7 @@
       </p:grpSp>
       <p:pic>
         <p:nvPicPr>
-          <p:cNvPr id="1968070554" name="Picture 6" descr="Railroad Tracks - Charcoal Drawing by Michael Vigliotti - Pixels"/>
+          <p:cNvPr id="1861246338" name="Picture 6" descr="Railroad Tracks - Charcoal Drawing by Michael Vigliotti - Pixels"/>
           <p:cNvPicPr>
             <a:picLocks noChangeAspect="1" noChangeArrowheads="1"/>
           </p:cNvPicPr>
@@ -14059,7 +14145,7 @@
       </p:grpSpPr>
       <p:sp>
         <p:nvSpPr>
-          <p:cNvPr id="1880191783" name="Title 1"/>
+          <p:cNvPr id="1268833932" name="Title 1"/>
           <p:cNvSpPr>
             <a:spLocks noGrp="1"/>
           </p:cNvSpPr>
@@ -14092,7 +14178,7 @@
       </p:sp>
       <p:sp>
         <p:nvSpPr>
-          <p:cNvPr id="281203520" name="Content Placeholder 2"/>
+          <p:cNvPr id="1081663045" name="Content Placeholder 2"/>
           <p:cNvSpPr>
             <a:spLocks noGrp="1"/>
           </p:cNvSpPr>
@@ -14214,7 +14300,7 @@
       </p:sp>
       <p:sp>
         <p:nvSpPr>
-          <p:cNvPr id="905764944" name="Footer Placeholder 4"/>
+          <p:cNvPr id="462844058" name="Footer Placeholder 4"/>
           <p:cNvSpPr>
             <a:spLocks noGrp="1"/>
           </p:cNvSpPr>
@@ -14240,7 +14326,7 @@
       </p:sp>
       <p:sp>
         <p:nvSpPr>
-          <p:cNvPr id="707850069" name="TextBox 11"/>
+          <p:cNvPr id="2051542518" name="TextBox 11"/>
           <p:cNvSpPr txBox="1"/>
           <p:nvPr/>
         </p:nvSpPr>
@@ -14345,7 +14431,7 @@
       </p:sp>
       <p:pic>
         <p:nvPicPr>
-          <p:cNvPr id="1883380893" name="Ink 6"/>
+          <p:cNvPr id="821015210" name="Ink 6"/>
           <p:cNvPicPr/>
           <p:nvPr/>
         </p:nvPicPr>
@@ -14365,7 +14451,7 @@
       </p:pic>
       <p:grpSp>
         <p:nvGrpSpPr>
-          <p:cNvPr id="1398247418" name="Group 13"/>
+          <p:cNvPr id="1879888418" name="Group 13"/>
           <p:cNvGrpSpPr/>
           <p:nvPr/>
         </p:nvGrpSpPr>
@@ -14420,7 +14506,7 @@
       </p:grpSp>
       <p:pic>
         <p:nvPicPr>
-          <p:cNvPr id="281801672" name="Ink 17"/>
+          <p:cNvPr id="1562219529" name="Ink 17"/>
           <p:cNvPicPr/>
           <p:nvPr/>
         </p:nvPicPr>
@@ -14485,7 +14571,7 @@
                                           </p:stCondLst>
                                         </p:cTn>
                                         <p:tgtEl>
-                                          <p:spTgt spid="281203520">
+                                          <p:spTgt spid="1081663045">
                                             <p:txEl>
                                               <p:pRg st="0" end="0"/>
                                             </p:txEl>
@@ -14516,7 +14602,7 @@
                                           </p:stCondLst>
                                         </p:cTn>
                                         <p:tgtEl>
-                                          <p:spTgt spid="281203520">
+                                          <p:spTgt spid="1081663045">
                                             <p:txEl>
                                               <p:pRg st="1" end="1"/>
                                             </p:txEl>
@@ -14565,7 +14651,7 @@
                                           </p:stCondLst>
                                         </p:cTn>
                                         <p:tgtEl>
-                                          <p:spTgt spid="281203520">
+                                          <p:spTgt spid="1081663045">
                                             <p:txEl>
                                               <p:pRg st="3" end="3"/>
                                             </p:txEl>
@@ -14614,7 +14700,7 @@
                                           </p:stCondLst>
                                         </p:cTn>
                                         <p:tgtEl>
-                                          <p:spTgt spid="281203520">
+                                          <p:spTgt spid="1081663045">
                                             <p:txEl>
                                               <p:pRg st="4" end="4"/>
                                             </p:txEl>
@@ -14645,7 +14731,7 @@
                                           </p:stCondLst>
                                         </p:cTn>
                                         <p:tgtEl>
-                                          <p:spTgt spid="281203520">
+                                          <p:spTgt spid="1081663045">
                                             <p:txEl>
                                               <p:pRg st="5" end="5"/>
                                             </p:txEl>
@@ -14676,7 +14762,7 @@
                                           </p:stCondLst>
                                         </p:cTn>
                                         <p:tgtEl>
-                                          <p:spTgt spid="281203520">
+                                          <p:spTgt spid="1081663045">
                                             <p:txEl>
                                               <p:pRg st="6" end="6"/>
                                             </p:txEl>
@@ -14725,7 +14811,7 @@
                                           </p:stCondLst>
                                         </p:cTn>
                                         <p:tgtEl>
-                                          <p:spTgt spid="281203520">
+                                          <p:spTgt spid="1081663045">
                                             <p:txEl>
                                               <p:pRg st="7" end="7"/>
                                             </p:txEl>
@@ -14756,7 +14842,7 @@
                                           </p:stCondLst>
                                         </p:cTn>
                                         <p:tgtEl>
-                                          <p:spTgt spid="281203520">
+                                          <p:spTgt spid="1081663045">
                                             <p:txEl>
                                               <p:pRg st="8" end="8"/>
                                             </p:txEl>
@@ -14805,7 +14891,7 @@
                                           </p:stCondLst>
                                         </p:cTn>
                                         <p:tgtEl>
-                                          <p:spTgt spid="707850069"/>
+                                          <p:spTgt spid="2051542518"/>
                                         </p:tgtEl>
                                         <p:attrNameLst>
                                           <p:attrName>style.visibility</p:attrName>
@@ -14841,7 +14927,7 @@
                                           </p:stCondLst>
                                         </p:cTn>
                                         <p:tgtEl>
-                                          <p:spTgt spid="1883380893"/>
+                                          <p:spTgt spid="821015210"/>
                                         </p:tgtEl>
                                         <p:attrNameLst>
                                           <p:attrName>style.visibility</p:attrName>
@@ -14855,7 +14941,7 @@
                                       <p:cBhvr>
                                         <p:cTn id="34" dur="500" fill="hold"/>
                                         <p:tgtEl>
-                                          <p:spTgt spid="1883380893"/>
+                                          <p:spTgt spid="821015210"/>
                                         </p:tgtEl>
                                         <p:attrNameLst>
                                           <p:attrName>drawProgress</p:attrName>
@@ -14900,7 +14986,7 @@
                                           </p:stCondLst>
                                         </p:cTn>
                                         <p:tgtEl>
-                                          <p:spTgt spid="1398247418"/>
+                                          <p:spTgt spid="1879888418"/>
                                         </p:tgtEl>
                                         <p:attrNameLst>
                                           <p:attrName>style.visibility</p:attrName>
@@ -14914,7 +15000,7 @@
                                       <p:cBhvr>
                                         <p:cTn id="38" dur="500" fill="hold"/>
                                         <p:tgtEl>
-                                          <p:spTgt spid="1398247418"/>
+                                          <p:spTgt spid="1879888418"/>
                                         </p:tgtEl>
                                         <p:attrNameLst>
                                           <p:attrName>drawProgress</p:attrName>
@@ -14959,7 +15045,7 @@
                                           </p:stCondLst>
                                         </p:cTn>
                                         <p:tgtEl>
-                                          <p:spTgt spid="281801672"/>
+                                          <p:spTgt spid="1562219529"/>
                                         </p:tgtEl>
                                         <p:attrNameLst>
                                           <p:attrName>style.visibility</p:attrName>
@@ -14973,7 +15059,7 @@
                                       <p:cBhvr>
                                         <p:cTn id="42" dur="250" fill="hold"/>
                                         <p:tgtEl>
-                                          <p:spTgt spid="281801672"/>
+                                          <p:spTgt spid="1562219529"/>
                                         </p:tgtEl>
                                         <p:attrNameLst>
                                           <p:attrName>drawProgress</p:attrName>
@@ -15014,7 +15100,7 @@
                                       <p:cBhvr>
                                         <p:cTn id="45" dur="500" fill="hold"/>
                                         <p:tgtEl>
-                                          <p:spTgt spid="281801672"/>
+                                          <p:spTgt spid="1562219529"/>
                                         </p:tgtEl>
                                       </p:cBhvr>
                                       <p:by x="150000" y="150000"/>
@@ -15050,7 +15136,7 @@
       </p:par>
     </p:tnLst>
     <p:bldLst>
-      <p:bldP spid="707850069" grpId="0"/>
+      <p:bldP spid="2051542518" grpId="0"/>
     </p:bldLst>
   </p:timing>
 </p:sld>
@@ -15075,7 +15161,7 @@
       </p:grpSpPr>
       <p:sp>
         <p:nvSpPr>
-          <p:cNvPr id="1269208599" name="Title 1"/>
+          <p:cNvPr id="682441170" name="Title 1"/>
           <p:cNvSpPr>
             <a:spLocks noGrp="1"/>
           </p:cNvSpPr>
@@ -15108,7 +15194,7 @@
       </p:sp>
       <p:sp>
         <p:nvSpPr>
-          <p:cNvPr id="811298449" name="Content Placeholder 2"/>
+          <p:cNvPr id="1987985311" name="Content Placeholder 2"/>
           <p:cNvSpPr>
             <a:spLocks noGrp="1"/>
           </p:cNvSpPr>
@@ -15234,7 +15320,7 @@
       </p:sp>
       <p:sp>
         <p:nvSpPr>
-          <p:cNvPr id="492852592" name="Footer Placeholder 4"/>
+          <p:cNvPr id="282391480" name="Footer Placeholder 4"/>
           <p:cNvSpPr>
             <a:spLocks noGrp="1"/>
           </p:cNvSpPr>
@@ -15260,7 +15346,7 @@
       </p:sp>
       <p:sp>
         <p:nvSpPr>
-          <p:cNvPr id="758087175" name="Content Placeholder 2"/>
+          <p:cNvPr id="1713237069" name="Content Placeholder 2"/>
           <p:cNvSpPr txBox="1"/>
           <p:nvPr/>
         </p:nvSpPr>
@@ -15458,7 +15544,7 @@
       </p:sp>
       <p:sp>
         <p:nvSpPr>
-          <p:cNvPr id="483543938" name="TextBox 9"/>
+          <p:cNvPr id="1953314449" name="TextBox 9"/>
           <p:cNvSpPr txBox="1"/>
           <p:nvPr/>
         </p:nvSpPr>
@@ -15585,7 +15671,7 @@
       </p:sp>
       <p:sp>
         <p:nvSpPr>
-          <p:cNvPr id="233574599" name="TextBox 10"/>
+          <p:cNvPr id="865365931" name="TextBox 10"/>
           <p:cNvSpPr txBox="1"/>
           <p:nvPr/>
         </p:nvSpPr>
@@ -16016,6 +16102,923 @@
 </file>
 
 <file path=ppt/slides/slide24.xml><?xml version="1.0" encoding="utf-8"?>
+<p:sld xmlns:a="http://schemas.openxmlformats.org/drawingml/2006/main" xmlns:r="http://schemas.openxmlformats.org/officeDocument/2006/relationships" xmlns:p="http://schemas.openxmlformats.org/presentationml/2006/main" xmlns:m="http://schemas.openxmlformats.org/officeDocument/2006/math" xmlns:w="http://schemas.openxmlformats.org/wordprocessingml/2006/main" xmlns:mc="http://schemas.openxmlformats.org/markup-compatibility/2006" showMasterPhAnim="0" showMasterSp="1" show="0">
+  <p:cSld name="">
+    <p:spTree>
+      <p:nvGrpSpPr>
+        <p:cNvPr id="1" name=""/>
+        <p:cNvGrpSpPr/>
+        <p:nvPr/>
+      </p:nvGrpSpPr>
+      <p:grpSpPr bwMode="auto">
+        <a:xfrm>
+          <a:off x="0" y="0"/>
+          <a:ext cx="0" cy="0"/>
+          <a:chOff x="0" y="0"/>
+          <a:chExt cx="0" cy="0"/>
+        </a:xfrm>
+      </p:grpSpPr>
+      <p:sp>
+        <p:nvSpPr>
+          <p:cNvPr id="2118557748" name="Title 1"/>
+          <p:cNvSpPr>
+            <a:spLocks noGrp="1"/>
+          </p:cNvSpPr>
+          <p:nvPr>
+            <p:ph type="title"/>
+          </p:nvPr>
+        </p:nvSpPr>
+        <p:spPr bwMode="auto"/>
+        <p:txBody>
+          <a:bodyPr/>
+          <a:lstStyle/>
+          <a:p>
+            <a:pPr>
+              <a:defRPr/>
+            </a:pPr>
+            <a:r>
+              <a:rPr lang="en-GB" sz="2000"/>
+              <a:t>apps are not scripts</a:t>
+            </a:r>
+            <a:br>
+              <a:rPr lang="en-GB"/>
+            </a:br>
+            <a:r>
+              <a:rPr lang="en-GB"/>
+              <a:t>meta-PROGRAMMING</a:t>
+            </a:r>
+            <a:endParaRPr lang="nl-NL"/>
+          </a:p>
+        </p:txBody>
+      </p:sp>
+      <p:sp>
+        <p:nvSpPr>
+          <p:cNvPr id="361763024" name="Content Placeholder 2"/>
+          <p:cNvSpPr>
+            <a:spLocks noGrp="1"/>
+          </p:cNvSpPr>
+          <p:nvPr>
+            <p:ph sz="half" idx="1"/>
+          </p:nvPr>
+        </p:nvSpPr>
+        <p:spPr bwMode="auto">
+          <a:xfrm>
+            <a:off x="1265582" y="1825624"/>
+            <a:ext cx="5691801" cy="4105155"/>
+          </a:xfrm>
+        </p:spPr>
+        <p:txBody>
+          <a:bodyPr/>
+          <a:lstStyle/>
+          <a:p>
+            <a:pPr lvl="1">
+              <a:defRPr/>
+            </a:pPr>
+            <a:r>
+              <a:rPr/>
+              <a:t>Modern approach</a:t>
+            </a:r>
+            <a:endParaRPr/>
+          </a:p>
+          <a:p>
+            <a:pPr lvl="2">
+              <a:defRPr/>
+            </a:pPr>
+            <a:r>
+              <a:rPr/>
+              <a:t>Inputs are </a:t>
+            </a:r>
+            <a:r>
+              <a:rPr>
+                <a:solidFill>
+                  <a:schemeClr val="accent1"/>
+                </a:solidFill>
+              </a:rPr>
+              <a:t>symbols</a:t>
+            </a:r>
+            <a:r>
+              <a:rPr/>
+              <a:t>, not </a:t>
+            </a:r>
+            <a:r>
+              <a:rPr>
+                <a:solidFill>
+                  <a:schemeClr val="accent1"/>
+                </a:solidFill>
+              </a:rPr>
+              <a:t>characters</a:t>
+            </a:r>
+            <a:endParaRPr/>
+          </a:p>
+          <a:p>
+            <a:pPr lvl="2">
+              <a:defRPr/>
+            </a:pPr>
+            <a:r>
+              <a:rPr/>
+              <a:t>Still meta, just different</a:t>
+            </a:r>
+            <a:br>
+              <a:rPr/>
+            </a:br>
+            <a:r>
+              <a:rPr sz="1200"/>
+              <a:t>And better, for technical reasons we won’t go into here.</a:t>
+            </a:r>
+            <a:endParaRPr/>
+          </a:p>
+          <a:p>
+            <a:pPr lvl="1">
+              <a:defRPr/>
+            </a:pPr>
+            <a:endParaRPr lang="nl-NL"/>
+          </a:p>
+          <a:p>
+            <a:pPr lvl="1">
+              <a:defRPr/>
+            </a:pPr>
+            <a:endParaRPr lang="nl-NL"/>
+          </a:p>
+          <a:p>
+            <a:pPr marL="0" indent="0">
+              <a:buNone/>
+              <a:defRPr/>
+            </a:pPr>
+            <a:endParaRPr lang="nl-NL"/>
+          </a:p>
+        </p:txBody>
+      </p:sp>
+      <p:sp>
+        <p:nvSpPr>
+          <p:cNvPr id="1221221081" name="Footer Placeholder 4"/>
+          <p:cNvSpPr>
+            <a:spLocks noGrp="1"/>
+          </p:cNvSpPr>
+          <p:nvPr>
+            <p:ph type="ftr" sz="quarter" idx="11"/>
+          </p:nvPr>
+        </p:nvSpPr>
+        <p:spPr bwMode="auto"/>
+        <p:txBody>
+          <a:bodyPr/>
+          <a:lstStyle/>
+          <a:p>
+            <a:pPr>
+              <a:defRPr/>
+            </a:pPr>
+            <a:r>
+              <a:rPr/>
+              <a:t>2026-10-12, Karel Kroeze, BDSi. Shiny Workshop.</a:t>
+            </a:r>
+            <a:endParaRPr/>
+          </a:p>
+        </p:txBody>
+      </p:sp>
+      <p:sp>
+        <p:nvSpPr>
+          <p:cNvPr id="747913422" name="Content Placeholder 2"/>
+          <p:cNvSpPr txBox="1"/>
+          <p:nvPr/>
+        </p:nvSpPr>
+        <p:spPr bwMode="auto">
+          <a:xfrm>
+            <a:off x="7053072" y="1825624"/>
+            <a:ext cx="4703726" cy="4105155"/>
+          </a:xfrm>
+          <a:prstGeom prst="rect">
+            <a:avLst/>
+          </a:prstGeom>
+          <a:solidFill>
+            <a:schemeClr val="tx1">
+              <a:lumMod val="85000"/>
+              <a:lumOff val="15000"/>
+              <a:alpha val="68000"/>
+            </a:schemeClr>
+          </a:solidFill>
+        </p:spPr>
+        <p:txBody>
+          <a:bodyPr/>
+          <a:lstStyle>
+            <a:lvl1pPr marL="228600" indent="-228600" algn="l" defTabSz="914400" rtl="0">
+              <a:lnSpc>
+                <a:spcPct val="90000"/>
+              </a:lnSpc>
+              <a:spcBef>
+                <a:spcPts val="999"/>
+              </a:spcBef>
+              <a:buFont typeface="Arial"/>
+              <a:buChar char="•"/>
+              <a:defRPr sz="2800">
+                <a:solidFill>
+                  <a:schemeClr val="bg1"/>
+                </a:solidFill>
+                <a:latin typeface="+mn-lt"/>
+                <a:ea typeface="+mn-ea"/>
+                <a:cs typeface="+mn-cs"/>
+              </a:defRPr>
+            </a:lvl1pPr>
+            <a:lvl2pPr marL="685800" indent="-228600" algn="l" defTabSz="914400" rtl="0">
+              <a:lnSpc>
+                <a:spcPct val="90000"/>
+              </a:lnSpc>
+              <a:spcBef>
+                <a:spcPts val="499"/>
+              </a:spcBef>
+              <a:buFont typeface="Arial"/>
+              <a:buChar char="•"/>
+              <a:defRPr sz="2400">
+                <a:solidFill>
+                  <a:schemeClr val="bg1"/>
+                </a:solidFill>
+                <a:latin typeface="+mn-lt"/>
+                <a:ea typeface="+mn-ea"/>
+                <a:cs typeface="+mn-cs"/>
+              </a:defRPr>
+            </a:lvl2pPr>
+            <a:lvl3pPr marL="1143000" indent="-228600" algn="l" defTabSz="914400" rtl="0">
+              <a:lnSpc>
+                <a:spcPct val="90000"/>
+              </a:lnSpc>
+              <a:spcBef>
+                <a:spcPts val="499"/>
+              </a:spcBef>
+              <a:buFont typeface="Arial"/>
+              <a:buChar char="•"/>
+              <a:defRPr sz="2000">
+                <a:solidFill>
+                  <a:schemeClr val="bg1"/>
+                </a:solidFill>
+                <a:latin typeface="+mn-lt"/>
+                <a:ea typeface="+mn-ea"/>
+                <a:cs typeface="+mn-cs"/>
+              </a:defRPr>
+            </a:lvl3pPr>
+            <a:lvl4pPr marL="1600200" indent="-228600" algn="l" defTabSz="914400" rtl="0">
+              <a:lnSpc>
+                <a:spcPct val="90000"/>
+              </a:lnSpc>
+              <a:spcBef>
+                <a:spcPts val="499"/>
+              </a:spcBef>
+              <a:buFont typeface="Arial"/>
+              <a:buChar char="•"/>
+              <a:defRPr sz="1800">
+                <a:solidFill>
+                  <a:schemeClr val="bg1"/>
+                </a:solidFill>
+                <a:latin typeface="+mn-lt"/>
+                <a:ea typeface="+mn-ea"/>
+                <a:cs typeface="+mn-cs"/>
+              </a:defRPr>
+            </a:lvl4pPr>
+            <a:lvl5pPr marL="2057400" indent="-228600" algn="l" defTabSz="914400" rtl="0">
+              <a:lnSpc>
+                <a:spcPct val="90000"/>
+              </a:lnSpc>
+              <a:spcBef>
+                <a:spcPts val="499"/>
+              </a:spcBef>
+              <a:buFont typeface="Arial"/>
+              <a:buChar char="•"/>
+              <a:defRPr sz="1800">
+                <a:solidFill>
+                  <a:schemeClr val="bg1"/>
+                </a:solidFill>
+                <a:latin typeface="+mn-lt"/>
+                <a:ea typeface="+mn-ea"/>
+                <a:cs typeface="+mn-cs"/>
+              </a:defRPr>
+            </a:lvl5pPr>
+            <a:lvl6pPr marL="2514599" indent="-228600" algn="l" defTabSz="914400" rtl="0">
+              <a:lnSpc>
+                <a:spcPct val="90000"/>
+              </a:lnSpc>
+              <a:spcBef>
+                <a:spcPts val="499"/>
+              </a:spcBef>
+              <a:buFont typeface="Arial"/>
+              <a:buChar char="•"/>
+              <a:defRPr sz="1800">
+                <a:solidFill>
+                  <a:schemeClr val="tx1"/>
+                </a:solidFill>
+                <a:latin typeface="+mn-lt"/>
+                <a:ea typeface="+mn-ea"/>
+                <a:cs typeface="+mn-cs"/>
+              </a:defRPr>
+            </a:lvl6pPr>
+            <a:lvl7pPr marL="2971800" indent="-228600" algn="l" defTabSz="914400" rtl="0">
+              <a:lnSpc>
+                <a:spcPct val="90000"/>
+              </a:lnSpc>
+              <a:spcBef>
+                <a:spcPts val="499"/>
+              </a:spcBef>
+              <a:buFont typeface="Arial"/>
+              <a:buChar char="•"/>
+              <a:defRPr sz="1800">
+                <a:solidFill>
+                  <a:schemeClr val="tx1"/>
+                </a:solidFill>
+                <a:latin typeface="+mn-lt"/>
+                <a:ea typeface="+mn-ea"/>
+                <a:cs typeface="+mn-cs"/>
+              </a:defRPr>
+            </a:lvl7pPr>
+            <a:lvl8pPr marL="3429000" indent="-228600" algn="l" defTabSz="914400" rtl="0">
+              <a:lnSpc>
+                <a:spcPct val="90000"/>
+              </a:lnSpc>
+              <a:spcBef>
+                <a:spcPts val="499"/>
+              </a:spcBef>
+              <a:buFont typeface="Arial"/>
+              <a:buChar char="•"/>
+              <a:defRPr sz="1800">
+                <a:solidFill>
+                  <a:schemeClr val="tx1"/>
+                </a:solidFill>
+                <a:latin typeface="+mn-lt"/>
+                <a:ea typeface="+mn-ea"/>
+                <a:cs typeface="+mn-cs"/>
+              </a:defRPr>
+            </a:lvl8pPr>
+            <a:lvl9pPr marL="3886200" indent="-228600" algn="l" defTabSz="914400" rtl="0">
+              <a:lnSpc>
+                <a:spcPct val="90000"/>
+              </a:lnSpc>
+              <a:spcBef>
+                <a:spcPts val="499"/>
+              </a:spcBef>
+              <a:buFont typeface="Arial"/>
+              <a:buChar char="•"/>
+              <a:defRPr sz="1800">
+                <a:solidFill>
+                  <a:schemeClr val="tx1"/>
+                </a:solidFill>
+                <a:latin typeface="+mn-lt"/>
+                <a:ea typeface="+mn-ea"/>
+                <a:cs typeface="+mn-cs"/>
+              </a:defRPr>
+            </a:lvl9pPr>
+          </a:lstStyle>
+          <a:p>
+            <a:pPr marL="0" indent="0">
+              <a:buFont typeface="Arial"/>
+              <a:buNone/>
+              <a:defRPr/>
+            </a:pPr>
+            <a:endParaRPr lang="nl-NL"/>
+          </a:p>
+        </p:txBody>
+      </p:sp>
+      <p:sp>
+        <p:nvSpPr>
+          <p:cNvPr id="1839322523" name="TextBox 9"/>
+          <p:cNvSpPr txBox="1"/>
+          <p:nvPr/>
+        </p:nvSpPr>
+        <p:spPr bwMode="auto">
+          <a:xfrm>
+            <a:off x="7120127" y="1914143"/>
+            <a:ext cx="4587239" cy="1310999"/>
+          </a:xfrm>
+          <a:prstGeom prst="rect">
+            <a:avLst/>
+          </a:prstGeom>
+          <a:noFill/>
+        </p:spPr>
+        <p:txBody>
+          <a:bodyPr wrap="square" rtlCol="0">
+            <a:spAutoFit/>
+          </a:bodyPr>
+          <a:lstStyle/>
+          <a:p>
+            <a:pPr>
+              <a:defRPr/>
+            </a:pPr>
+            <a:r>
+              <a:rPr lang="en-US" sz="1600">
+                <a:solidFill>
+                  <a:schemeClr val="bg1"/>
+                </a:solidFill>
+                <a:latin typeface="FiraCode Nerd Font Mono"/>
+                <a:ea typeface="FiraCode Nerd Font Mono"/>
+              </a:rPr>
+              <a:t>varSelectInput(</a:t>
+            </a:r>
+            <a:endParaRPr lang="en-US" sz="1600">
+              <a:solidFill>
+                <a:schemeClr val="bg1"/>
+              </a:solidFill>
+              <a:latin typeface="FiraCode Nerd Font Mono"/>
+              <a:ea typeface="FiraCode Nerd Font Mono"/>
+            </a:endParaRPr>
+          </a:p>
+          <a:p>
+            <a:pPr>
+              <a:defRPr/>
+            </a:pPr>
+            <a:r>
+              <a:rPr lang="en-US" sz="1600">
+                <a:solidFill>
+                  <a:schemeClr val="bg1"/>
+                </a:solidFill>
+                <a:latin typeface="FiraCode Nerd Font Mono"/>
+                <a:ea typeface="FiraCode Nerd Font Mono"/>
+              </a:rPr>
+              <a:t>    “x_axis”, </a:t>
+            </a:r>
+            <a:endParaRPr lang="en-US" sz="1600">
+              <a:solidFill>
+                <a:schemeClr val="bg1"/>
+              </a:solidFill>
+              <a:latin typeface="FiraCode Nerd Font Mono"/>
+              <a:ea typeface="FiraCode Nerd Font Mono"/>
+            </a:endParaRPr>
+          </a:p>
+          <a:p>
+            <a:pPr>
+              <a:defRPr/>
+            </a:pPr>
+            <a:r>
+              <a:rPr lang="en-US" sz="1600">
+                <a:solidFill>
+                  <a:schemeClr val="bg1"/>
+                </a:solidFill>
+                <a:latin typeface="FiraCode Nerd Font Mono"/>
+                <a:ea typeface="FiraCode Nerd Font Mono"/>
+              </a:rPr>
+              <a:t>    “Choose x-axis”, </a:t>
+            </a:r>
+            <a:endParaRPr lang="en-US" sz="1600">
+              <a:solidFill>
+                <a:schemeClr val="bg1"/>
+              </a:solidFill>
+              <a:latin typeface="FiraCode Nerd Font Mono"/>
+              <a:ea typeface="FiraCode Nerd Font Mono"/>
+            </a:endParaRPr>
+          </a:p>
+          <a:p>
+            <a:pPr>
+              <a:defRPr/>
+            </a:pPr>
+            <a:r>
+              <a:rPr lang="en-US" sz="1600">
+                <a:solidFill>
+                  <a:schemeClr val="bg1"/>
+                </a:solidFill>
+                <a:latin typeface="FiraCode Nerd Font Mono"/>
+                <a:ea typeface="FiraCode Nerd Font Mono"/>
+              </a:rPr>
+              <a:t>    data</a:t>
+            </a:r>
+            <a:endParaRPr lang="en-US" sz="1600">
+              <a:solidFill>
+                <a:schemeClr val="bg1"/>
+              </a:solidFill>
+              <a:latin typeface="FiraCode Nerd Font Mono"/>
+              <a:ea typeface="FiraCode Nerd Font Mono"/>
+            </a:endParaRPr>
+          </a:p>
+          <a:p>
+            <a:pPr>
+              <a:defRPr/>
+            </a:pPr>
+            <a:r>
+              <a:rPr lang="en-US" sz="1600">
+                <a:solidFill>
+                  <a:schemeClr val="bg1"/>
+                </a:solidFill>
+                <a:latin typeface="FiraCode Nerd Font Mono"/>
+                <a:ea typeface="FiraCode Nerd Font Mono"/>
+              </a:rPr>
+              <a:t>)</a:t>
+            </a:r>
+            <a:endParaRPr/>
+          </a:p>
+        </p:txBody>
+      </p:sp>
+      <p:sp>
+        <p:nvSpPr>
+          <p:cNvPr id="1333839453" name="TextBox 10"/>
+          <p:cNvSpPr txBox="1"/>
+          <p:nvPr/>
+        </p:nvSpPr>
+        <p:spPr bwMode="auto">
+          <a:xfrm>
+            <a:off x="7120127" y="3428997"/>
+            <a:ext cx="4558439" cy="2286360"/>
+          </a:xfrm>
+          <a:prstGeom prst="rect">
+            <a:avLst/>
+          </a:prstGeom>
+          <a:noFill/>
+        </p:spPr>
+        <p:txBody>
+          <a:bodyPr wrap="square" rtlCol="0">
+            <a:spAutoFit/>
+          </a:bodyPr>
+          <a:lstStyle/>
+          <a:p>
+            <a:pPr>
+              <a:defRPr/>
+            </a:pPr>
+            <a:r>
+              <a:rPr lang="en-GB" sz="1600">
+                <a:solidFill>
+                  <a:schemeClr val="accent6">
+                    <a:lumMod val="60000"/>
+                    <a:lumOff val="40000"/>
+                  </a:schemeClr>
+                </a:solidFill>
+                <a:latin typeface="FiraCode Nerd Font Mono"/>
+                <a:ea typeface="FiraCode Nerd Font Mono"/>
+              </a:rPr>
+              <a:t>ggplot</a:t>
+            </a:r>
+            <a:r>
+              <a:rPr lang="en-GB" sz="1600">
+                <a:solidFill>
+                  <a:schemeClr val="accent6">
+                    <a:lumMod val="60000"/>
+                    <a:lumOff val="40000"/>
+                  </a:schemeClr>
+                </a:solidFill>
+                <a:latin typeface="FiraCode Nerd Font Mono"/>
+                <a:ea typeface="FiraCode Nerd Font Mono"/>
+              </a:rPr>
+              <a:t>(</a:t>
+            </a:r>
+            <a:r>
+              <a:rPr lang="en-GB" sz="1600">
+                <a:solidFill>
+                  <a:schemeClr val="accent6">
+                    <a:lumMod val="60000"/>
+                    <a:lumOff val="40000"/>
+                  </a:schemeClr>
+                </a:solidFill>
+                <a:latin typeface="FiraCode Nerd Font Mono"/>
+                <a:ea typeface="FiraCode Nerd Font Mono"/>
+              </a:rPr>
+              <a:t>aes</a:t>
+            </a:r>
+            <a:r>
+              <a:rPr lang="en-GB" sz="1600">
+                <a:solidFill>
+                  <a:schemeClr val="accent6">
+                    <a:lumMod val="60000"/>
+                    <a:lumOff val="40000"/>
+                  </a:schemeClr>
+                </a:solidFill>
+                <a:latin typeface="FiraCode Nerd Font Mono"/>
+                <a:ea typeface="FiraCode Nerd Font Mono"/>
+              </a:rPr>
+              <a:t>(</a:t>
+            </a:r>
+            <a:endParaRPr/>
+          </a:p>
+          <a:p>
+            <a:pPr>
+              <a:defRPr/>
+            </a:pPr>
+            <a:r>
+              <a:rPr lang="en-GB" sz="1600">
+                <a:solidFill>
+                  <a:schemeClr val="accent6">
+                    <a:lumMod val="60000"/>
+                    <a:lumOff val="40000"/>
+                  </a:schemeClr>
+                </a:solidFill>
+                <a:latin typeface="FiraCode Nerd Font Mono"/>
+                <a:ea typeface="FiraCode Nerd Font Mono"/>
+              </a:rPr>
+              <a:t>    x = </a:t>
+            </a:r>
+            <a:r>
+              <a:rPr lang="en-GB" sz="1600" b="1">
+                <a:solidFill>
+                  <a:schemeClr val="accent6">
+                    <a:lumMod val="60000"/>
+                    <a:lumOff val="40000"/>
+                  </a:schemeClr>
+                </a:solidFill>
+                <a:latin typeface="FiraCode Nerd Font Mono"/>
+                <a:ea typeface="FiraCode Nerd Font Mono"/>
+              </a:rPr>
+              <a:t>input$</a:t>
+            </a:r>
+            <a:r>
+              <a:rPr lang="en-US" sz="1600" b="1">
+                <a:solidFill>
+                  <a:schemeClr val="accent6">
+                    <a:lumMod val="60000"/>
+                    <a:lumOff val="40000"/>
+                  </a:schemeClr>
+                </a:solidFill>
+                <a:latin typeface="FiraCode Nerd Font Mono"/>
+                <a:ea typeface="FiraCode Nerd Font Mono"/>
+              </a:rPr>
+              <a:t>x_axis</a:t>
+            </a:r>
+            <a:r>
+              <a:rPr lang="en-GB" sz="1600">
+                <a:solidFill>
+                  <a:schemeClr val="accent6">
+                    <a:lumMod val="60000"/>
+                    <a:lumOff val="40000"/>
+                  </a:schemeClr>
+                </a:solidFill>
+                <a:latin typeface="FiraCode Nerd Font Mono"/>
+                <a:ea typeface="FiraCode Nerd Font Mono"/>
+              </a:rPr>
+              <a:t>, </a:t>
+            </a:r>
+            <a:endParaRPr/>
+          </a:p>
+          <a:p>
+            <a:pPr>
+              <a:defRPr/>
+            </a:pPr>
+            <a:r>
+              <a:rPr lang="en-GB" sz="1600">
+                <a:solidFill>
+                  <a:schemeClr val="accent6">
+                    <a:lumMod val="60000"/>
+                    <a:lumOff val="40000"/>
+                  </a:schemeClr>
+                </a:solidFill>
+                <a:latin typeface="FiraCode Nerd Font Mono"/>
+                <a:ea typeface="FiraCode Nerd Font Mono"/>
+              </a:rPr>
+              <a:t>    y = </a:t>
+            </a:r>
+            <a:r>
+              <a:rPr lang="en-US" sz="1600">
+                <a:solidFill>
+                  <a:schemeClr val="accent6">
+                    <a:lumMod val="60000"/>
+                    <a:lumOff val="40000"/>
+                  </a:schemeClr>
+                </a:solidFill>
+                <a:latin typeface="FiraCode Nerd Font Mono"/>
+                <a:ea typeface="FiraCode Nerd Font Mono"/>
+              </a:rPr>
+              <a:t>outcome</a:t>
+            </a:r>
+            <a:endParaRPr lang="en-GB" sz="1600">
+              <a:solidFill>
+                <a:schemeClr val="accent6">
+                  <a:lumMod val="60000"/>
+                  <a:lumOff val="40000"/>
+                </a:schemeClr>
+              </a:solidFill>
+              <a:latin typeface="FiraCode Nerd Font Mono"/>
+              <a:ea typeface="FiraCode Nerd Font Mono"/>
+            </a:endParaRPr>
+          </a:p>
+          <a:p>
+            <a:pPr>
+              <a:defRPr/>
+            </a:pPr>
+            <a:r>
+              <a:rPr lang="en-GB" sz="1600">
+                <a:solidFill>
+                  <a:schemeClr val="accent6">
+                    <a:lumMod val="60000"/>
+                    <a:lumOff val="40000"/>
+                  </a:schemeClr>
+                </a:solidFill>
+                <a:latin typeface="FiraCode Nerd Font Mono"/>
+                <a:ea typeface="FiraCode Nerd Font Mono"/>
+              </a:rPr>
+              <a:t>)) + …</a:t>
+            </a:r>
+            <a:endParaRPr/>
+          </a:p>
+          <a:p>
+            <a:pPr>
+              <a:defRPr/>
+            </a:pPr>
+            <a:endParaRPr lang="en-GB" sz="1600">
+              <a:solidFill>
+                <a:schemeClr val="accent6">
+                  <a:lumMod val="60000"/>
+                  <a:lumOff val="40000"/>
+                </a:schemeClr>
+              </a:solidFill>
+              <a:latin typeface="FiraCode Nerd Font Mono"/>
+              <a:ea typeface="FiraCode Nerd Font Mono"/>
+            </a:endParaRPr>
+          </a:p>
+          <a:p>
+            <a:pPr>
+              <a:defRPr/>
+            </a:pPr>
+            <a:r>
+              <a:rPr lang="en-GB" sz="1600">
+                <a:solidFill>
+                  <a:schemeClr val="accent4">
+                    <a:lumMod val="60000"/>
+                    <a:lumOff val="40000"/>
+                  </a:schemeClr>
+                </a:solidFill>
+                <a:latin typeface="FiraCode Nerd Font Mono"/>
+                <a:ea typeface="FiraCode Nerd Font Mono"/>
+              </a:rPr>
+              <a:t>ggplot</a:t>
+            </a:r>
+            <a:r>
+              <a:rPr lang="en-GB" sz="1600">
+                <a:solidFill>
+                  <a:schemeClr val="accent4">
+                    <a:lumMod val="60000"/>
+                    <a:lumOff val="40000"/>
+                  </a:schemeClr>
+                </a:solidFill>
+                <a:latin typeface="FiraCode Nerd Font Mono"/>
+                <a:ea typeface="FiraCode Nerd Font Mono"/>
+              </a:rPr>
+              <a:t>(</a:t>
+            </a:r>
+            <a:r>
+              <a:rPr lang="en-GB" sz="1600">
+                <a:solidFill>
+                  <a:schemeClr val="accent4">
+                    <a:lumMod val="60000"/>
+                    <a:lumOff val="40000"/>
+                  </a:schemeClr>
+                </a:solidFill>
+                <a:latin typeface="FiraCode Nerd Font Mono"/>
+                <a:ea typeface="FiraCode Nerd Font Mono"/>
+              </a:rPr>
+              <a:t>aes</a:t>
+            </a:r>
+            <a:r>
+              <a:rPr lang="en-GB" sz="1600">
+                <a:solidFill>
+                  <a:schemeClr val="accent4">
+                    <a:lumMod val="60000"/>
+                    <a:lumOff val="40000"/>
+                  </a:schemeClr>
+                </a:solidFill>
+                <a:latin typeface="FiraCode Nerd Font Mono"/>
+                <a:ea typeface="FiraCode Nerd Font Mono"/>
+              </a:rPr>
+              <a:t>(</a:t>
+            </a:r>
+            <a:endParaRPr/>
+          </a:p>
+          <a:p>
+            <a:pPr>
+              <a:defRPr/>
+            </a:pPr>
+            <a:r>
+              <a:rPr lang="en-GB" sz="1600">
+                <a:solidFill>
+                  <a:schemeClr val="accent4">
+                    <a:lumMod val="60000"/>
+                    <a:lumOff val="40000"/>
+                  </a:schemeClr>
+                </a:solidFill>
+                <a:latin typeface="FiraCode Nerd Font Mono"/>
+                <a:ea typeface="FiraCode Nerd Font Mono"/>
+              </a:rPr>
+              <a:t>    x = </a:t>
+            </a:r>
+            <a:r>
+              <a:rPr lang="en-US" sz="1600">
+                <a:solidFill>
+                  <a:schemeClr val="accent4">
+                    <a:lumMod val="60000"/>
+                    <a:lumOff val="40000"/>
+                  </a:schemeClr>
+                </a:solidFill>
+                <a:latin typeface="FiraCode Nerd Font Mono"/>
+                <a:ea typeface="FiraCode Nerd Font Mono"/>
+              </a:rPr>
+              <a:t>!!</a:t>
+            </a:r>
+            <a:r>
+              <a:rPr lang="en-GB" sz="1600" b="1">
+                <a:solidFill>
+                  <a:schemeClr val="accent4">
+                    <a:lumMod val="60000"/>
+                    <a:lumOff val="40000"/>
+                  </a:schemeClr>
+                </a:solidFill>
+                <a:latin typeface="FiraCode Nerd Font Mono"/>
+                <a:ea typeface="FiraCode Nerd Font Mono"/>
+              </a:rPr>
+              <a:t>input$</a:t>
+            </a:r>
+            <a:r>
+              <a:rPr lang="en-US" sz="1600" b="1">
+                <a:solidFill>
+                  <a:schemeClr val="accent4">
+                    <a:lumMod val="60000"/>
+                    <a:lumOff val="40000"/>
+                  </a:schemeClr>
+                </a:solidFill>
+                <a:latin typeface="FiraCode Nerd Font Mono"/>
+                <a:ea typeface="FiraCode Nerd Font Mono"/>
+              </a:rPr>
+              <a:t>x_axis</a:t>
+            </a:r>
+            <a:r>
+              <a:rPr lang="en-GB" sz="1600">
+                <a:solidFill>
+                  <a:schemeClr val="accent4">
+                    <a:lumMod val="60000"/>
+                    <a:lumOff val="40000"/>
+                  </a:schemeClr>
+                </a:solidFill>
+                <a:latin typeface="FiraCode Nerd Font Mono"/>
+                <a:ea typeface="FiraCode Nerd Font Mono"/>
+              </a:rPr>
+              <a:t>, </a:t>
+            </a:r>
+            <a:endParaRPr/>
+          </a:p>
+          <a:p>
+            <a:pPr>
+              <a:defRPr/>
+            </a:pPr>
+            <a:r>
+              <a:rPr lang="en-GB" sz="1600">
+                <a:solidFill>
+                  <a:schemeClr val="accent4">
+                    <a:lumMod val="60000"/>
+                    <a:lumOff val="40000"/>
+                  </a:schemeClr>
+                </a:solidFill>
+                <a:latin typeface="FiraCode Nerd Font Mono"/>
+                <a:ea typeface="FiraCode Nerd Font Mono"/>
+              </a:rPr>
+              <a:t>    y = </a:t>
+            </a:r>
+            <a:r>
+              <a:rPr lang="en-US" sz="1600">
+                <a:solidFill>
+                  <a:schemeClr val="accent4">
+                    <a:lumMod val="60000"/>
+                    <a:lumOff val="40000"/>
+                  </a:schemeClr>
+                </a:solidFill>
+                <a:latin typeface="FiraCode Nerd Font Mono"/>
+                <a:ea typeface="FiraCode Nerd Font Mono"/>
+              </a:rPr>
+              <a:t>outcome</a:t>
+            </a:r>
+            <a:endParaRPr lang="en-GB" sz="1600">
+              <a:solidFill>
+                <a:schemeClr val="accent4">
+                  <a:lumMod val="60000"/>
+                  <a:lumOff val="40000"/>
+                </a:schemeClr>
+              </a:solidFill>
+              <a:latin typeface="FiraCode Nerd Font Mono"/>
+              <a:ea typeface="FiraCode Nerd Font Mono"/>
+            </a:endParaRPr>
+          </a:p>
+          <a:p>
+            <a:pPr>
+              <a:defRPr/>
+            </a:pPr>
+            <a:r>
+              <a:rPr lang="en-GB" sz="1600">
+                <a:solidFill>
+                  <a:schemeClr val="accent4">
+                    <a:lumMod val="60000"/>
+                    <a:lumOff val="40000"/>
+                  </a:schemeClr>
+                </a:solidFill>
+                <a:latin typeface="FiraCode Nerd Font Mono"/>
+                <a:ea typeface="FiraCode Nerd Font Mono"/>
+              </a:rPr>
+              <a:t>)) + …</a:t>
+            </a:r>
+            <a:endParaRPr/>
+          </a:p>
+        </p:txBody>
+      </p:sp>
+    </p:spTree>
+  </p:cSld>
+  <p:clrMapOvr>
+    <a:masterClrMapping/>
+  </p:clrMapOvr>
+  <mc:AlternateContent xmlns:mc="http://schemas.openxmlformats.org/markup-compatibility/2006">
+    <mc:Choice xmlns:p159="http://schemas.microsoft.com/office/powerpoint/2015/09/main" xmlns:p14="http://schemas.microsoft.com/office/powerpoint/2010/main" Requires="p159">
+      <p:transition p14:dur="500" advClick="1"/>
+    </mc:Choice>
+    <mc:Fallback>
+      <p:transition advClick="1"/>
+    </mc:Fallback>
+  </mc:AlternateContent>
+</p:sld>
+</file>
+
+<file path=ppt/slides/slide25.xml><?xml version="1.0" encoding="utf-8"?>
 <p:sld xmlns:a="http://schemas.openxmlformats.org/drawingml/2006/main" xmlns:r="http://schemas.openxmlformats.org/officeDocument/2006/relationships" xmlns:p="http://schemas.openxmlformats.org/presentationml/2006/main" xmlns:m="http://schemas.openxmlformats.org/officeDocument/2006/math" xmlns:w="http://schemas.openxmlformats.org/wordprocessingml/2006/main" xmlns:mc="http://schemas.openxmlformats.org/markup-compatibility/2006" showMasterPhAnim="0" showMasterSp="1" show="1">
   <p:cSld name="">
     <p:spTree>
@@ -16034,7 +17037,7 @@
       </p:grpSpPr>
       <p:sp>
         <p:nvSpPr>
-          <p:cNvPr id="1348717250" name="Title 1"/>
+          <p:cNvPr id="448266691" name="Title 5"/>
           <p:cNvSpPr>
             <a:spLocks noGrp="1"/>
           </p:cNvSpPr>
@@ -16051,23 +17054,16 @@
               <a:defRPr/>
             </a:pPr>
             <a:r>
-              <a:rPr lang="en-GB" sz="2000"/>
-              <a:t>apps are not scripts</a:t>
-            </a:r>
-            <a:br>
-              <a:rPr lang="en-GB"/>
-            </a:br>
-            <a:r>
-              <a:rPr lang="en-GB"/>
-              <a:t>meta-PROGRAMMING</a:t>
-            </a:r>
-            <a:endParaRPr lang="nl-NL"/>
-          </a:p>
-        </p:txBody>
-      </p:sp>
-      <p:sp>
-        <p:nvSpPr>
-          <p:cNvPr id="45496433" name="Content Placeholder 2"/>
+              <a:rPr lang="en-US"/>
+              <a:t>Additional Resources</a:t>
+            </a:r>
+            <a:endParaRPr/>
+          </a:p>
+        </p:txBody>
+      </p:sp>
+      <p:sp>
+        <p:nvSpPr>
+          <p:cNvPr id="1304495542" name="Content Placeholder 6"/>
           <p:cNvSpPr>
             <a:spLocks noGrp="1"/>
           </p:cNvSpPr>
@@ -16077,94 +17073,143 @@
         </p:nvSpPr>
         <p:spPr bwMode="auto">
           <a:xfrm>
-            <a:off x="1265582" y="1825624"/>
-            <a:ext cx="5691801" cy="4105155"/>
+            <a:off x="1265582" y="1819528"/>
+            <a:ext cx="10515600" cy="4351338"/>
           </a:xfrm>
         </p:spPr>
         <p:txBody>
           <a:bodyPr/>
           <a:lstStyle/>
           <a:p>
-            <a:pPr lvl="1">
-              <a:defRPr/>
-            </a:pPr>
-            <a:r>
-              <a:rPr/>
-              <a:t>Modern approach</a:t>
-            </a:r>
-            <a:endParaRPr/>
-          </a:p>
-          <a:p>
-            <a:pPr lvl="2">
-              <a:defRPr/>
-            </a:pPr>
-            <a:r>
-              <a:rPr/>
-              <a:t>Inputs are </a:t>
-            </a:r>
-            <a:r>
-              <a:rPr>
-                <a:solidFill>
-                  <a:schemeClr val="accent1"/>
-                </a:solidFill>
+            <a:pPr>
+              <a:defRPr/>
+            </a:pPr>
+            <a:endParaRPr lang="en-GB"/>
+          </a:p>
+          <a:p>
+            <a:pPr marL="457200" lvl="1" indent="0">
+              <a:buNone/>
+              <a:defRPr/>
+            </a:pPr>
+            <a:r>
+              <a:rPr lang="en-US"/>
+              <a:t>Slides, Examples, etc.</a:t>
+            </a:r>
+            <a:endParaRPr lang="en-US"/>
+          </a:p>
+          <a:p>
+            <a:pPr marL="457200" lvl="1" indent="0">
+              <a:buNone/>
+              <a:defRPr/>
+            </a:pPr>
+            <a:r>
+              <a:rPr lang="en-US" u="sng">
+                <a:hlinkClick r:id="rId3" tooltip=""/>
               </a:rPr>
-              <a:t>symbols</a:t>
-            </a:r>
-            <a:r>
-              <a:rPr/>
-              <a:t>, not </a:t>
-            </a:r>
-            <a:r>
-              <a:rPr>
-                <a:solidFill>
-                  <a:schemeClr val="accent1"/>
-                </a:solidFill>
+              <a:t>https://github.com/bdsi</a:t>
+            </a:r>
+            <a:r>
+              <a:rPr lang="en-US" u="sng">
+                <a:hlinkClick r:id="rId3" tooltip=""/>
               </a:rPr>
-              <a:t>characters</a:t>
-            </a:r>
-            <a:endParaRPr/>
-          </a:p>
-          <a:p>
-            <a:pPr lvl="2">
-              <a:defRPr/>
-            </a:pPr>
-            <a:r>
-              <a:rPr/>
-              <a:t>Still meta, just different</a:t>
-            </a:r>
-            <a:br>
-              <a:rPr/>
-            </a:br>
-            <a:r>
-              <a:rPr sz="1200"/>
-              <a:t>And better, for technical reasons we won’t go into here.</a:t>
-            </a:r>
-            <a:endParaRPr/>
-          </a:p>
-          <a:p>
-            <a:pPr lvl="1">
-              <a:defRPr/>
-            </a:pPr>
-            <a:endParaRPr lang="nl-NL"/>
-          </a:p>
-          <a:p>
-            <a:pPr lvl="1">
-              <a:defRPr/>
-            </a:pPr>
-            <a:endParaRPr lang="nl-NL"/>
-          </a:p>
-          <a:p>
-            <a:pPr marL="0" indent="0">
+              <a:t>-utwente/shiny-workshop</a:t>
+            </a:r>
+            <a:endParaRPr lang="en-US"/>
+          </a:p>
+          <a:p>
+            <a:pPr marL="457200" lvl="1" indent="0">
               <a:buNone/>
               <a:defRPr/>
             </a:pPr>
-            <a:endParaRPr lang="nl-NL"/>
-          </a:p>
-        </p:txBody>
-      </p:sp>
-      <p:sp>
-        <p:nvSpPr>
-          <p:cNvPr id="1146435041" name="Footer Placeholder 4"/>
+            <a:endParaRPr lang="en-US"/>
+          </a:p>
+          <a:p>
+            <a:pPr marL="457200" lvl="1" indent="0">
+              <a:buNone/>
+              <a:defRPr/>
+            </a:pPr>
+            <a:r>
+              <a:rPr lang="en-US" i="1"/>
+              <a:t>Mastering Shiny </a:t>
+            </a:r>
+            <a:r>
+              <a:rPr lang="en-US" i="0"/>
+              <a:t>free online book</a:t>
+            </a:r>
+            <a:endParaRPr lang="en-US" i="0"/>
+          </a:p>
+          <a:p>
+            <a:pPr marL="457200" lvl="1" indent="0">
+              <a:buNone/>
+              <a:defRPr/>
+            </a:pPr>
+            <a:r>
+              <a:rPr lang="en-US" sz="2400" b="0" i="0" u="sng" strike="noStrike" cap="none" spc="0">
+                <a:solidFill>
+                  <a:schemeClr val="bg1"/>
+                </a:solidFill>
+                <a:latin typeface="Arial"/>
+                <a:ea typeface="Arial"/>
+                <a:cs typeface="Arial"/>
+                <a:hlinkClick r:id="rId4" tooltip=""/>
+              </a:rPr>
+              <a:t>https://mastering-shiny.org/</a:t>
+            </a:r>
+            <a:endParaRPr lang="en-US" i="0"/>
+          </a:p>
+          <a:p>
+            <a:pPr marL="457200" lvl="1" indent="0">
+              <a:buNone/>
+              <a:defRPr/>
+            </a:pPr>
+            <a:endParaRPr i="0"/>
+          </a:p>
+          <a:p>
+            <a:pPr marL="457200" lvl="1" indent="0">
+              <a:buNone/>
+              <a:defRPr/>
+            </a:pPr>
+            <a:r>
+              <a:rPr lang="en-US" i="0"/>
+              <a:t>Large </a:t>
+            </a:r>
+            <a:r>
+              <a:rPr lang="en-US" i="0"/>
+              <a:t>collection of examples &amp; showcases of real apps</a:t>
+            </a:r>
+            <a:endParaRPr lang="en-US" i="0"/>
+          </a:p>
+          <a:p>
+            <a:pPr marL="457200" lvl="1" indent="0">
+              <a:buNone/>
+              <a:defRPr/>
+            </a:pPr>
+            <a:r>
+              <a:rPr lang="en-US" sz="2400" b="0" i="0" u="sng" strike="noStrike" cap="none" spc="0">
+                <a:solidFill>
+                  <a:schemeClr val="bg1"/>
+                </a:solidFill>
+                <a:latin typeface="Arial"/>
+                <a:ea typeface="Arial"/>
+                <a:cs typeface="Arial"/>
+                <a:hlinkClick r:id="rId5" tooltip=""/>
+              </a:rPr>
+              <a:t>https://shiny.posit.co/r/gallery/</a:t>
+            </a:r>
+            <a:endParaRPr lang="en-US" i="0"/>
+          </a:p>
+          <a:p>
+            <a:pPr marL="457200" lvl="1" indent="0">
+              <a:buNone/>
+              <a:defRPr/>
+            </a:pPr>
+            <a:endParaRPr i="0"/>
+          </a:p>
+        </p:txBody>
+      </p:sp>
+      <p:sp>
+        <p:nvSpPr>
+          <p:cNvPr id="2098955327" name="Footer Placeholder 1"/>
           <p:cNvSpPr>
             <a:spLocks noGrp="1"/>
           </p:cNvSpPr>
@@ -16183,734 +17228,6 @@
             <a:r>
               <a:rPr/>
               <a:t>2026-10-12, Karel Kroeze, BDSi. Shiny Workshop.</a:t>
-            </a:r>
-            <a:endParaRPr/>
-          </a:p>
-        </p:txBody>
-      </p:sp>
-      <p:sp>
-        <p:nvSpPr>
-          <p:cNvPr id="871262137" name="Content Placeholder 2"/>
-          <p:cNvSpPr txBox="1"/>
-          <p:nvPr/>
-        </p:nvSpPr>
-        <p:spPr bwMode="auto">
-          <a:xfrm>
-            <a:off x="7053072" y="1825624"/>
-            <a:ext cx="4703726" cy="4105155"/>
-          </a:xfrm>
-          <a:prstGeom prst="rect">
-            <a:avLst/>
-          </a:prstGeom>
-          <a:solidFill>
-            <a:schemeClr val="tx1">
-              <a:lumMod val="85000"/>
-              <a:lumOff val="15000"/>
-              <a:alpha val="68000"/>
-            </a:schemeClr>
-          </a:solidFill>
-        </p:spPr>
-        <p:txBody>
-          <a:bodyPr/>
-          <a:lstStyle>
-            <a:lvl1pPr marL="228600" indent="-228600" algn="l" defTabSz="914400" rtl="0">
-              <a:lnSpc>
-                <a:spcPct val="90000"/>
-              </a:lnSpc>
-              <a:spcBef>
-                <a:spcPts val="999"/>
-              </a:spcBef>
-              <a:buFont typeface="Arial"/>
-              <a:buChar char="•"/>
-              <a:defRPr sz="2800">
-                <a:solidFill>
-                  <a:schemeClr val="bg1"/>
-                </a:solidFill>
-                <a:latin typeface="+mn-lt"/>
-                <a:ea typeface="+mn-ea"/>
-                <a:cs typeface="+mn-cs"/>
-              </a:defRPr>
-            </a:lvl1pPr>
-            <a:lvl2pPr marL="685800" indent="-228600" algn="l" defTabSz="914400" rtl="0">
-              <a:lnSpc>
-                <a:spcPct val="90000"/>
-              </a:lnSpc>
-              <a:spcBef>
-                <a:spcPts val="499"/>
-              </a:spcBef>
-              <a:buFont typeface="Arial"/>
-              <a:buChar char="•"/>
-              <a:defRPr sz="2400">
-                <a:solidFill>
-                  <a:schemeClr val="bg1"/>
-                </a:solidFill>
-                <a:latin typeface="+mn-lt"/>
-                <a:ea typeface="+mn-ea"/>
-                <a:cs typeface="+mn-cs"/>
-              </a:defRPr>
-            </a:lvl2pPr>
-            <a:lvl3pPr marL="1143000" indent="-228600" algn="l" defTabSz="914400" rtl="0">
-              <a:lnSpc>
-                <a:spcPct val="90000"/>
-              </a:lnSpc>
-              <a:spcBef>
-                <a:spcPts val="499"/>
-              </a:spcBef>
-              <a:buFont typeface="Arial"/>
-              <a:buChar char="•"/>
-              <a:defRPr sz="2000">
-                <a:solidFill>
-                  <a:schemeClr val="bg1"/>
-                </a:solidFill>
-                <a:latin typeface="+mn-lt"/>
-                <a:ea typeface="+mn-ea"/>
-                <a:cs typeface="+mn-cs"/>
-              </a:defRPr>
-            </a:lvl3pPr>
-            <a:lvl4pPr marL="1600200" indent="-228600" algn="l" defTabSz="914400" rtl="0">
-              <a:lnSpc>
-                <a:spcPct val="90000"/>
-              </a:lnSpc>
-              <a:spcBef>
-                <a:spcPts val="499"/>
-              </a:spcBef>
-              <a:buFont typeface="Arial"/>
-              <a:buChar char="•"/>
-              <a:defRPr sz="1800">
-                <a:solidFill>
-                  <a:schemeClr val="bg1"/>
-                </a:solidFill>
-                <a:latin typeface="+mn-lt"/>
-                <a:ea typeface="+mn-ea"/>
-                <a:cs typeface="+mn-cs"/>
-              </a:defRPr>
-            </a:lvl4pPr>
-            <a:lvl5pPr marL="2057400" indent="-228600" algn="l" defTabSz="914400" rtl="0">
-              <a:lnSpc>
-                <a:spcPct val="90000"/>
-              </a:lnSpc>
-              <a:spcBef>
-                <a:spcPts val="499"/>
-              </a:spcBef>
-              <a:buFont typeface="Arial"/>
-              <a:buChar char="•"/>
-              <a:defRPr sz="1800">
-                <a:solidFill>
-                  <a:schemeClr val="bg1"/>
-                </a:solidFill>
-                <a:latin typeface="+mn-lt"/>
-                <a:ea typeface="+mn-ea"/>
-                <a:cs typeface="+mn-cs"/>
-              </a:defRPr>
-            </a:lvl5pPr>
-            <a:lvl6pPr marL="2514599" indent="-228600" algn="l" defTabSz="914400" rtl="0">
-              <a:lnSpc>
-                <a:spcPct val="90000"/>
-              </a:lnSpc>
-              <a:spcBef>
-                <a:spcPts val="499"/>
-              </a:spcBef>
-              <a:buFont typeface="Arial"/>
-              <a:buChar char="•"/>
-              <a:defRPr sz="1800">
-                <a:solidFill>
-                  <a:schemeClr val="tx1"/>
-                </a:solidFill>
-                <a:latin typeface="+mn-lt"/>
-                <a:ea typeface="+mn-ea"/>
-                <a:cs typeface="+mn-cs"/>
-              </a:defRPr>
-            </a:lvl6pPr>
-            <a:lvl7pPr marL="2971800" indent="-228600" algn="l" defTabSz="914400" rtl="0">
-              <a:lnSpc>
-                <a:spcPct val="90000"/>
-              </a:lnSpc>
-              <a:spcBef>
-                <a:spcPts val="499"/>
-              </a:spcBef>
-              <a:buFont typeface="Arial"/>
-              <a:buChar char="•"/>
-              <a:defRPr sz="1800">
-                <a:solidFill>
-                  <a:schemeClr val="tx1"/>
-                </a:solidFill>
-                <a:latin typeface="+mn-lt"/>
-                <a:ea typeface="+mn-ea"/>
-                <a:cs typeface="+mn-cs"/>
-              </a:defRPr>
-            </a:lvl7pPr>
-            <a:lvl8pPr marL="3429000" indent="-228600" algn="l" defTabSz="914400" rtl="0">
-              <a:lnSpc>
-                <a:spcPct val="90000"/>
-              </a:lnSpc>
-              <a:spcBef>
-                <a:spcPts val="499"/>
-              </a:spcBef>
-              <a:buFont typeface="Arial"/>
-              <a:buChar char="•"/>
-              <a:defRPr sz="1800">
-                <a:solidFill>
-                  <a:schemeClr val="tx1"/>
-                </a:solidFill>
-                <a:latin typeface="+mn-lt"/>
-                <a:ea typeface="+mn-ea"/>
-                <a:cs typeface="+mn-cs"/>
-              </a:defRPr>
-            </a:lvl8pPr>
-            <a:lvl9pPr marL="3886200" indent="-228600" algn="l" defTabSz="914400" rtl="0">
-              <a:lnSpc>
-                <a:spcPct val="90000"/>
-              </a:lnSpc>
-              <a:spcBef>
-                <a:spcPts val="499"/>
-              </a:spcBef>
-              <a:buFont typeface="Arial"/>
-              <a:buChar char="•"/>
-              <a:defRPr sz="1800">
-                <a:solidFill>
-                  <a:schemeClr val="tx1"/>
-                </a:solidFill>
-                <a:latin typeface="+mn-lt"/>
-                <a:ea typeface="+mn-ea"/>
-                <a:cs typeface="+mn-cs"/>
-              </a:defRPr>
-            </a:lvl9pPr>
-          </a:lstStyle>
-          <a:p>
-            <a:pPr marL="0" indent="0">
-              <a:buFont typeface="Arial"/>
-              <a:buNone/>
-              <a:defRPr/>
-            </a:pPr>
-            <a:endParaRPr lang="nl-NL"/>
-          </a:p>
-        </p:txBody>
-      </p:sp>
-      <p:sp>
-        <p:nvSpPr>
-          <p:cNvPr id="1651923931" name="TextBox 9"/>
-          <p:cNvSpPr txBox="1"/>
-          <p:nvPr/>
-        </p:nvSpPr>
-        <p:spPr bwMode="auto">
-          <a:xfrm>
-            <a:off x="7120127" y="1914143"/>
-            <a:ext cx="4587239" cy="1310999"/>
-          </a:xfrm>
-          <a:prstGeom prst="rect">
-            <a:avLst/>
-          </a:prstGeom>
-          <a:noFill/>
-        </p:spPr>
-        <p:txBody>
-          <a:bodyPr wrap="square" rtlCol="0">
-            <a:spAutoFit/>
-          </a:bodyPr>
-          <a:lstStyle/>
-          <a:p>
-            <a:pPr>
-              <a:defRPr/>
-            </a:pPr>
-            <a:r>
-              <a:rPr lang="en-US" sz="1600">
-                <a:solidFill>
-                  <a:schemeClr val="bg1"/>
-                </a:solidFill>
-                <a:latin typeface="FiraCode Nerd Font Mono"/>
-                <a:ea typeface="FiraCode Nerd Font Mono"/>
-              </a:rPr>
-              <a:t>varSelectInput(</a:t>
-            </a:r>
-            <a:endParaRPr lang="en-US" sz="1600">
-              <a:solidFill>
-                <a:schemeClr val="bg1"/>
-              </a:solidFill>
-              <a:latin typeface="FiraCode Nerd Font Mono"/>
-              <a:ea typeface="FiraCode Nerd Font Mono"/>
-            </a:endParaRPr>
-          </a:p>
-          <a:p>
-            <a:pPr>
-              <a:defRPr/>
-            </a:pPr>
-            <a:r>
-              <a:rPr lang="en-US" sz="1600">
-                <a:solidFill>
-                  <a:schemeClr val="bg1"/>
-                </a:solidFill>
-                <a:latin typeface="FiraCode Nerd Font Mono"/>
-                <a:ea typeface="FiraCode Nerd Font Mono"/>
-              </a:rPr>
-              <a:t>    “x_axis”, </a:t>
-            </a:r>
-            <a:endParaRPr lang="en-US" sz="1600">
-              <a:solidFill>
-                <a:schemeClr val="bg1"/>
-              </a:solidFill>
-              <a:latin typeface="FiraCode Nerd Font Mono"/>
-              <a:ea typeface="FiraCode Nerd Font Mono"/>
-            </a:endParaRPr>
-          </a:p>
-          <a:p>
-            <a:pPr>
-              <a:defRPr/>
-            </a:pPr>
-            <a:r>
-              <a:rPr lang="en-US" sz="1600">
-                <a:solidFill>
-                  <a:schemeClr val="bg1"/>
-                </a:solidFill>
-                <a:latin typeface="FiraCode Nerd Font Mono"/>
-                <a:ea typeface="FiraCode Nerd Font Mono"/>
-              </a:rPr>
-              <a:t>    “Choose x-axis”, </a:t>
-            </a:r>
-            <a:endParaRPr lang="en-US" sz="1600">
-              <a:solidFill>
-                <a:schemeClr val="bg1"/>
-              </a:solidFill>
-              <a:latin typeface="FiraCode Nerd Font Mono"/>
-              <a:ea typeface="FiraCode Nerd Font Mono"/>
-            </a:endParaRPr>
-          </a:p>
-          <a:p>
-            <a:pPr>
-              <a:defRPr/>
-            </a:pPr>
-            <a:r>
-              <a:rPr lang="en-US" sz="1600">
-                <a:solidFill>
-                  <a:schemeClr val="bg1"/>
-                </a:solidFill>
-                <a:latin typeface="FiraCode Nerd Font Mono"/>
-                <a:ea typeface="FiraCode Nerd Font Mono"/>
-              </a:rPr>
-              <a:t>    data</a:t>
-            </a:r>
-            <a:endParaRPr lang="en-US" sz="1600">
-              <a:solidFill>
-                <a:schemeClr val="bg1"/>
-              </a:solidFill>
-              <a:latin typeface="FiraCode Nerd Font Mono"/>
-              <a:ea typeface="FiraCode Nerd Font Mono"/>
-            </a:endParaRPr>
-          </a:p>
-          <a:p>
-            <a:pPr>
-              <a:defRPr/>
-            </a:pPr>
-            <a:r>
-              <a:rPr lang="en-US" sz="1600">
-                <a:solidFill>
-                  <a:schemeClr val="bg1"/>
-                </a:solidFill>
-                <a:latin typeface="FiraCode Nerd Font Mono"/>
-                <a:ea typeface="FiraCode Nerd Font Mono"/>
-              </a:rPr>
-              <a:t>)</a:t>
-            </a:r>
-            <a:endParaRPr/>
-          </a:p>
-        </p:txBody>
-      </p:sp>
-      <p:sp>
-        <p:nvSpPr>
-          <p:cNvPr id="2034001661" name="TextBox 10"/>
-          <p:cNvSpPr txBox="1"/>
-          <p:nvPr/>
-        </p:nvSpPr>
-        <p:spPr bwMode="auto">
-          <a:xfrm>
-            <a:off x="7120127" y="3428998"/>
-            <a:ext cx="4558439" cy="2286360"/>
-          </a:xfrm>
-          <a:prstGeom prst="rect">
-            <a:avLst/>
-          </a:prstGeom>
-          <a:noFill/>
-        </p:spPr>
-        <p:txBody>
-          <a:bodyPr wrap="square" rtlCol="0">
-            <a:spAutoFit/>
-          </a:bodyPr>
-          <a:lstStyle/>
-          <a:p>
-            <a:pPr>
-              <a:defRPr/>
-            </a:pPr>
-            <a:r>
-              <a:rPr lang="en-GB" sz="1600">
-                <a:solidFill>
-                  <a:schemeClr val="accent6">
-                    <a:lumMod val="60000"/>
-                    <a:lumOff val="40000"/>
-                  </a:schemeClr>
-                </a:solidFill>
-                <a:latin typeface="FiraCode Nerd Font Mono"/>
-                <a:ea typeface="FiraCode Nerd Font Mono"/>
-              </a:rPr>
-              <a:t>ggplot</a:t>
-            </a:r>
-            <a:r>
-              <a:rPr lang="en-GB" sz="1600">
-                <a:solidFill>
-                  <a:schemeClr val="accent6">
-                    <a:lumMod val="60000"/>
-                    <a:lumOff val="40000"/>
-                  </a:schemeClr>
-                </a:solidFill>
-                <a:latin typeface="FiraCode Nerd Font Mono"/>
-                <a:ea typeface="FiraCode Nerd Font Mono"/>
-              </a:rPr>
-              <a:t>(</a:t>
-            </a:r>
-            <a:r>
-              <a:rPr lang="en-GB" sz="1600">
-                <a:solidFill>
-                  <a:schemeClr val="accent6">
-                    <a:lumMod val="60000"/>
-                    <a:lumOff val="40000"/>
-                  </a:schemeClr>
-                </a:solidFill>
-                <a:latin typeface="FiraCode Nerd Font Mono"/>
-                <a:ea typeface="FiraCode Nerd Font Mono"/>
-              </a:rPr>
-              <a:t>aes</a:t>
-            </a:r>
-            <a:r>
-              <a:rPr lang="en-GB" sz="1600">
-                <a:solidFill>
-                  <a:schemeClr val="accent6">
-                    <a:lumMod val="60000"/>
-                    <a:lumOff val="40000"/>
-                  </a:schemeClr>
-                </a:solidFill>
-                <a:latin typeface="FiraCode Nerd Font Mono"/>
-                <a:ea typeface="FiraCode Nerd Font Mono"/>
-              </a:rPr>
-              <a:t>(</a:t>
-            </a:r>
-            <a:endParaRPr/>
-          </a:p>
-          <a:p>
-            <a:pPr>
-              <a:defRPr/>
-            </a:pPr>
-            <a:r>
-              <a:rPr lang="en-GB" sz="1600">
-                <a:solidFill>
-                  <a:schemeClr val="accent6">
-                    <a:lumMod val="60000"/>
-                    <a:lumOff val="40000"/>
-                  </a:schemeClr>
-                </a:solidFill>
-                <a:latin typeface="FiraCode Nerd Font Mono"/>
-                <a:ea typeface="FiraCode Nerd Font Mono"/>
-              </a:rPr>
-              <a:t>    x = </a:t>
-            </a:r>
-            <a:r>
-              <a:rPr lang="en-GB" sz="1600" b="1">
-                <a:solidFill>
-                  <a:schemeClr val="accent6">
-                    <a:lumMod val="60000"/>
-                    <a:lumOff val="40000"/>
-                  </a:schemeClr>
-                </a:solidFill>
-                <a:latin typeface="FiraCode Nerd Font Mono"/>
-                <a:ea typeface="FiraCode Nerd Font Mono"/>
-              </a:rPr>
-              <a:t>input$</a:t>
-            </a:r>
-            <a:r>
-              <a:rPr lang="en-US" sz="1600" b="1">
-                <a:solidFill>
-                  <a:schemeClr val="accent6">
-                    <a:lumMod val="60000"/>
-                    <a:lumOff val="40000"/>
-                  </a:schemeClr>
-                </a:solidFill>
-                <a:latin typeface="FiraCode Nerd Font Mono"/>
-                <a:ea typeface="FiraCode Nerd Font Mono"/>
-              </a:rPr>
-              <a:t>x_axis</a:t>
-            </a:r>
-            <a:r>
-              <a:rPr lang="en-GB" sz="1600">
-                <a:solidFill>
-                  <a:schemeClr val="accent6">
-                    <a:lumMod val="60000"/>
-                    <a:lumOff val="40000"/>
-                  </a:schemeClr>
-                </a:solidFill>
-                <a:latin typeface="FiraCode Nerd Font Mono"/>
-                <a:ea typeface="FiraCode Nerd Font Mono"/>
-              </a:rPr>
-              <a:t>, </a:t>
-            </a:r>
-            <a:endParaRPr/>
-          </a:p>
-          <a:p>
-            <a:pPr>
-              <a:defRPr/>
-            </a:pPr>
-            <a:r>
-              <a:rPr lang="en-GB" sz="1600">
-                <a:solidFill>
-                  <a:schemeClr val="accent6">
-                    <a:lumMod val="60000"/>
-                    <a:lumOff val="40000"/>
-                  </a:schemeClr>
-                </a:solidFill>
-                <a:latin typeface="FiraCode Nerd Font Mono"/>
-                <a:ea typeface="FiraCode Nerd Font Mono"/>
-              </a:rPr>
-              <a:t>    y = </a:t>
-            </a:r>
-            <a:r>
-              <a:rPr lang="en-US" sz="1600">
-                <a:solidFill>
-                  <a:schemeClr val="accent6">
-                    <a:lumMod val="60000"/>
-                    <a:lumOff val="40000"/>
-                  </a:schemeClr>
-                </a:solidFill>
-                <a:latin typeface="FiraCode Nerd Font Mono"/>
-                <a:ea typeface="FiraCode Nerd Font Mono"/>
-              </a:rPr>
-              <a:t>outcome</a:t>
-            </a:r>
-            <a:endParaRPr lang="en-GB" sz="1600">
-              <a:solidFill>
-                <a:schemeClr val="accent6">
-                  <a:lumMod val="60000"/>
-                  <a:lumOff val="40000"/>
-                </a:schemeClr>
-              </a:solidFill>
-              <a:latin typeface="FiraCode Nerd Font Mono"/>
-              <a:ea typeface="FiraCode Nerd Font Mono"/>
-            </a:endParaRPr>
-          </a:p>
-          <a:p>
-            <a:pPr>
-              <a:defRPr/>
-            </a:pPr>
-            <a:r>
-              <a:rPr lang="en-GB" sz="1600">
-                <a:solidFill>
-                  <a:schemeClr val="accent6">
-                    <a:lumMod val="60000"/>
-                    <a:lumOff val="40000"/>
-                  </a:schemeClr>
-                </a:solidFill>
-                <a:latin typeface="FiraCode Nerd Font Mono"/>
-                <a:ea typeface="FiraCode Nerd Font Mono"/>
-              </a:rPr>
-              <a:t>)) + …</a:t>
-            </a:r>
-            <a:endParaRPr/>
-          </a:p>
-          <a:p>
-            <a:pPr>
-              <a:defRPr/>
-            </a:pPr>
-            <a:endParaRPr lang="en-GB" sz="1600">
-              <a:solidFill>
-                <a:schemeClr val="accent6">
-                  <a:lumMod val="60000"/>
-                  <a:lumOff val="40000"/>
-                </a:schemeClr>
-              </a:solidFill>
-              <a:latin typeface="FiraCode Nerd Font Mono"/>
-              <a:ea typeface="FiraCode Nerd Font Mono"/>
-            </a:endParaRPr>
-          </a:p>
-          <a:p>
-            <a:pPr>
-              <a:defRPr/>
-            </a:pPr>
-            <a:r>
-              <a:rPr lang="en-GB" sz="1600">
-                <a:solidFill>
-                  <a:schemeClr val="accent4">
-                    <a:lumMod val="60000"/>
-                    <a:lumOff val="40000"/>
-                  </a:schemeClr>
-                </a:solidFill>
-                <a:latin typeface="FiraCode Nerd Font Mono"/>
-                <a:ea typeface="FiraCode Nerd Font Mono"/>
-              </a:rPr>
-              <a:t>ggplot</a:t>
-            </a:r>
-            <a:r>
-              <a:rPr lang="en-GB" sz="1600">
-                <a:solidFill>
-                  <a:schemeClr val="accent4">
-                    <a:lumMod val="60000"/>
-                    <a:lumOff val="40000"/>
-                  </a:schemeClr>
-                </a:solidFill>
-                <a:latin typeface="FiraCode Nerd Font Mono"/>
-                <a:ea typeface="FiraCode Nerd Font Mono"/>
-              </a:rPr>
-              <a:t>(</a:t>
-            </a:r>
-            <a:r>
-              <a:rPr lang="en-GB" sz="1600">
-                <a:solidFill>
-                  <a:schemeClr val="accent4">
-                    <a:lumMod val="60000"/>
-                    <a:lumOff val="40000"/>
-                  </a:schemeClr>
-                </a:solidFill>
-                <a:latin typeface="FiraCode Nerd Font Mono"/>
-                <a:ea typeface="FiraCode Nerd Font Mono"/>
-              </a:rPr>
-              <a:t>aes</a:t>
-            </a:r>
-            <a:r>
-              <a:rPr lang="en-GB" sz="1600">
-                <a:solidFill>
-                  <a:schemeClr val="accent4">
-                    <a:lumMod val="60000"/>
-                    <a:lumOff val="40000"/>
-                  </a:schemeClr>
-                </a:solidFill>
-                <a:latin typeface="FiraCode Nerd Font Mono"/>
-                <a:ea typeface="FiraCode Nerd Font Mono"/>
-              </a:rPr>
-              <a:t>(</a:t>
-            </a:r>
-            <a:endParaRPr/>
-          </a:p>
-          <a:p>
-            <a:pPr>
-              <a:defRPr/>
-            </a:pPr>
-            <a:r>
-              <a:rPr lang="en-GB" sz="1600">
-                <a:solidFill>
-                  <a:schemeClr val="accent4">
-                    <a:lumMod val="60000"/>
-                    <a:lumOff val="40000"/>
-                  </a:schemeClr>
-                </a:solidFill>
-                <a:latin typeface="FiraCode Nerd Font Mono"/>
-                <a:ea typeface="FiraCode Nerd Font Mono"/>
-              </a:rPr>
-              <a:t>    x = </a:t>
-            </a:r>
-            <a:r>
-              <a:rPr lang="en-US" sz="1600">
-                <a:solidFill>
-                  <a:schemeClr val="accent4">
-                    <a:lumMod val="60000"/>
-                    <a:lumOff val="40000"/>
-                  </a:schemeClr>
-                </a:solidFill>
-                <a:latin typeface="FiraCode Nerd Font Mono"/>
-                <a:ea typeface="FiraCode Nerd Font Mono"/>
-              </a:rPr>
-              <a:t>!!</a:t>
-            </a:r>
-            <a:r>
-              <a:rPr lang="en-GB" sz="1600" b="1">
-                <a:solidFill>
-                  <a:schemeClr val="accent4">
-                    <a:lumMod val="60000"/>
-                    <a:lumOff val="40000"/>
-                  </a:schemeClr>
-                </a:solidFill>
-                <a:latin typeface="FiraCode Nerd Font Mono"/>
-                <a:ea typeface="FiraCode Nerd Font Mono"/>
-              </a:rPr>
-              <a:t>input$</a:t>
-            </a:r>
-            <a:r>
-              <a:rPr lang="en-US" sz="1600" b="1">
-                <a:solidFill>
-                  <a:schemeClr val="accent4">
-                    <a:lumMod val="60000"/>
-                    <a:lumOff val="40000"/>
-                  </a:schemeClr>
-                </a:solidFill>
-                <a:latin typeface="FiraCode Nerd Font Mono"/>
-                <a:ea typeface="FiraCode Nerd Font Mono"/>
-              </a:rPr>
-              <a:t>x_axis</a:t>
-            </a:r>
-            <a:r>
-              <a:rPr lang="en-GB" sz="1600">
-                <a:solidFill>
-                  <a:schemeClr val="accent4">
-                    <a:lumMod val="60000"/>
-                    <a:lumOff val="40000"/>
-                  </a:schemeClr>
-                </a:solidFill>
-                <a:latin typeface="FiraCode Nerd Font Mono"/>
-                <a:ea typeface="FiraCode Nerd Font Mono"/>
-              </a:rPr>
-              <a:t>, </a:t>
-            </a:r>
-            <a:endParaRPr/>
-          </a:p>
-          <a:p>
-            <a:pPr>
-              <a:defRPr/>
-            </a:pPr>
-            <a:r>
-              <a:rPr lang="en-GB" sz="1600">
-                <a:solidFill>
-                  <a:schemeClr val="accent4">
-                    <a:lumMod val="60000"/>
-                    <a:lumOff val="40000"/>
-                  </a:schemeClr>
-                </a:solidFill>
-                <a:latin typeface="FiraCode Nerd Font Mono"/>
-                <a:ea typeface="FiraCode Nerd Font Mono"/>
-              </a:rPr>
-              <a:t>    y = </a:t>
-            </a:r>
-            <a:r>
-              <a:rPr lang="en-US" sz="1600">
-                <a:solidFill>
-                  <a:schemeClr val="accent4">
-                    <a:lumMod val="60000"/>
-                    <a:lumOff val="40000"/>
-                  </a:schemeClr>
-                </a:solidFill>
-                <a:latin typeface="FiraCode Nerd Font Mono"/>
-                <a:ea typeface="FiraCode Nerd Font Mono"/>
-              </a:rPr>
-              <a:t>outcome</a:t>
-            </a:r>
-            <a:endParaRPr lang="en-GB" sz="1600">
-              <a:solidFill>
-                <a:schemeClr val="accent4">
-                  <a:lumMod val="60000"/>
-                  <a:lumOff val="40000"/>
-                </a:schemeClr>
-              </a:solidFill>
-              <a:latin typeface="FiraCode Nerd Font Mono"/>
-              <a:ea typeface="FiraCode Nerd Font Mono"/>
-            </a:endParaRPr>
-          </a:p>
-          <a:p>
-            <a:pPr>
-              <a:defRPr/>
-            </a:pPr>
-            <a:r>
-              <a:rPr lang="en-GB" sz="1600">
-                <a:solidFill>
-                  <a:schemeClr val="accent4">
-                    <a:lumMod val="60000"/>
-                    <a:lumOff val="40000"/>
-                  </a:schemeClr>
-                </a:solidFill>
-                <a:latin typeface="FiraCode Nerd Font Mono"/>
-                <a:ea typeface="FiraCode Nerd Font Mono"/>
-              </a:rPr>
-              <a:t>)) + …</a:t>
             </a:r>
             <a:endParaRPr/>
           </a:p>
@@ -16951,7 +17268,7 @@
       </p:grpSpPr>
       <p:sp>
         <p:nvSpPr>
-          <p:cNvPr id="937372136" name="Title 5"/>
+          <p:cNvPr id="1259008127" name="Title 5"/>
           <p:cNvSpPr>
             <a:spLocks noGrp="1"/>
           </p:cNvSpPr>
@@ -16977,7 +17294,7 @@
       </p:sp>
       <p:sp>
         <p:nvSpPr>
-          <p:cNvPr id="1043107178" name="Content Placeholder 6"/>
+          <p:cNvPr id="795492881" name="Content Placeholder 6"/>
           <p:cNvSpPr>
             <a:spLocks noGrp="1"/>
           </p:cNvSpPr>
@@ -17058,7 +17375,7 @@
       </p:sp>
       <p:sp>
         <p:nvSpPr>
-          <p:cNvPr id="1864166731" name="Footer Placeholder 1"/>
+          <p:cNvPr id="1879732458" name="Footer Placeholder 1"/>
           <p:cNvSpPr>
             <a:spLocks noGrp="1"/>
           </p:cNvSpPr>
@@ -17117,7 +17434,7 @@
       </p:grpSpPr>
       <p:sp>
         <p:nvSpPr>
-          <p:cNvPr id="1503331392" name="Title 5"/>
+          <p:cNvPr id="1990836557" name="Title 5"/>
           <p:cNvSpPr>
             <a:spLocks noGrp="1"/>
           </p:cNvSpPr>
@@ -17150,7 +17467,7 @@
       </p:sp>
       <p:sp>
         <p:nvSpPr>
-          <p:cNvPr id="1501644229" name="Content Placeholder 6"/>
+          <p:cNvPr id="1893708335" name="Content Placeholder 6"/>
           <p:cNvSpPr>
             <a:spLocks noGrp="1"/>
           </p:cNvSpPr>
@@ -17249,7 +17566,7 @@
       </p:sp>
       <p:pic>
         <p:nvPicPr>
-          <p:cNvPr id="657658416" name="Picture 4" descr="Logo&#10;&#10;Description automatically generated"/>
+          <p:cNvPr id="514285759" name="Picture 4" descr="Logo&#10;&#10;Description automatically generated"/>
           <p:cNvPicPr>
             <a:picLocks noChangeAspect="1"/>
           </p:cNvPicPr>
@@ -17271,7 +17588,7 @@
       </p:pic>
       <p:pic>
         <p:nvPicPr>
-          <p:cNvPr id="696168018" name="Picture 10" descr="A white circle on a black background&#10;&#10;Description automatically generated"/>
+          <p:cNvPr id="1363295065" name="Picture 10" descr="A white circle on a black background&#10;&#10;Description automatically generated"/>
           <p:cNvPicPr>
             <a:picLocks noChangeAspect="1"/>
           </p:cNvPicPr>
@@ -17293,7 +17610,7 @@
       </p:pic>
       <p:sp>
         <p:nvSpPr>
-          <p:cNvPr id="1681806144" name="Footer Placeholder 1"/>
+          <p:cNvPr id="1702174832" name="Footer Placeholder 1"/>
           <p:cNvSpPr>
             <a:spLocks noGrp="1"/>
           </p:cNvSpPr>
@@ -17352,7 +17669,7 @@
       </p:grpSpPr>
       <p:sp>
         <p:nvSpPr>
-          <p:cNvPr id="332345559" name="Title 5"/>
+          <p:cNvPr id="493822317" name="Title 5"/>
           <p:cNvSpPr>
             <a:spLocks noGrp="1"/>
           </p:cNvSpPr>
@@ -17389,7 +17706,7 @@
       </p:sp>
       <p:sp>
         <p:nvSpPr>
-          <p:cNvPr id="1792343773" name="Content Placeholder 6"/>
+          <p:cNvPr id="1987095926" name="Content Placeholder 6"/>
           <p:cNvSpPr>
             <a:spLocks noGrp="1"/>
           </p:cNvSpPr>
@@ -17435,7 +17752,7 @@
       </p:sp>
       <p:pic>
         <p:nvPicPr>
-          <p:cNvPr id="2012243387" name="Picture 6"/>
+          <p:cNvPr id="551267031" name="Picture 6"/>
           <p:cNvPicPr>
             <a:picLocks noChangeAspect="1" noChangeArrowheads="1"/>
           </p:cNvPicPr>
@@ -17465,7 +17782,7 @@
       </p:pic>
       <p:sp>
         <p:nvSpPr>
-          <p:cNvPr id="460830952" name="Arrow: Right 1"/>
+          <p:cNvPr id="462202250" name="Arrow: Right 1"/>
           <p:cNvSpPr/>
           <p:nvPr/>
         </p:nvSpPr>
@@ -17510,7 +17827,7 @@
       </p:sp>
       <p:sp>
         <p:nvSpPr>
-          <p:cNvPr id="1211244225" name="Arrow: Right 8"/>
+          <p:cNvPr id="1037357484" name="Arrow: Right 8"/>
           <p:cNvSpPr/>
           <p:nvPr/>
         </p:nvSpPr>
@@ -17555,7 +17872,7 @@
       </p:sp>
       <p:sp>
         <p:nvSpPr>
-          <p:cNvPr id="679618873" name="TextBox 10"/>
+          <p:cNvPr id="1844759506" name="TextBox 10"/>
           <p:cNvSpPr txBox="1"/>
           <p:nvPr/>
         </p:nvSpPr>
@@ -17602,7 +17919,7 @@
       </p:sp>
       <p:sp>
         <p:nvSpPr>
-          <p:cNvPr id="1594968114" name="Footer Placeholder 2"/>
+          <p:cNvPr id="216466239" name="Footer Placeholder 2"/>
           <p:cNvSpPr>
             <a:spLocks noGrp="1"/>
           </p:cNvSpPr>
@@ -17628,7 +17945,7 @@
       </p:sp>
       <p:pic>
         <p:nvPicPr>
-          <p:cNvPr id="1309693534" name="Picture 4"/>
+          <p:cNvPr id="440482830" name="Picture 4"/>
           <p:cNvPicPr>
             <a:picLocks noChangeAspect="1" noChangeArrowheads="1"/>
           </p:cNvPicPr>
@@ -17651,7 +17968,7 @@
       </p:pic>
       <p:pic>
         <p:nvPicPr>
-          <p:cNvPr id="916333626" name="Picture 6"/>
+          <p:cNvPr id="1306641511" name="Picture 6"/>
           <p:cNvPicPr>
             <a:picLocks noChangeAspect="1" noChangeArrowheads="1"/>
           </p:cNvPicPr>
@@ -17682,7 +17999,7 @@
       </p:pic>
       <p:pic>
         <p:nvPicPr>
-          <p:cNvPr id="2078067049" name="Picture 4"/>
+          <p:cNvPr id="1899804649" name="Picture 4"/>
           <p:cNvPicPr>
             <a:picLocks noChangeAspect="1" noChangeArrowheads="1"/>
           </p:cNvPicPr>
@@ -17746,7 +18063,7 @@
       </p:grpSpPr>
       <p:sp>
         <p:nvSpPr>
-          <p:cNvPr id="329643866" name="Title 5"/>
+          <p:cNvPr id="1735314550" name="Title 5"/>
           <p:cNvSpPr>
             <a:spLocks noGrp="1"/>
           </p:cNvSpPr>
@@ -17783,7 +18100,7 @@
       </p:sp>
       <p:sp>
         <p:nvSpPr>
-          <p:cNvPr id="575606418" name="Content Placeholder 6"/>
+          <p:cNvPr id="1821025392" name="Content Placeholder 6"/>
           <p:cNvSpPr>
             <a:spLocks noGrp="1"/>
           </p:cNvSpPr>
@@ -17829,7 +18146,7 @@
       </p:sp>
       <p:pic>
         <p:nvPicPr>
-          <p:cNvPr id="1690332157" name="Picture 4"/>
+          <p:cNvPr id="258902321" name="Picture 4"/>
           <p:cNvPicPr>
             <a:picLocks noChangeAspect="1" noChangeArrowheads="1"/>
           </p:cNvPicPr>
@@ -17859,7 +18176,7 @@
       </p:pic>
       <p:pic>
         <p:nvPicPr>
-          <p:cNvPr id="444001479" name="Picture 6"/>
+          <p:cNvPr id="1388867606" name="Picture 6"/>
           <p:cNvPicPr>
             <a:picLocks noChangeAspect="1" noChangeArrowheads="1"/>
           </p:cNvPicPr>
@@ -17889,7 +18206,7 @@
       </p:pic>
       <p:sp>
         <p:nvSpPr>
-          <p:cNvPr id="830728406" name="Arrow: Right 1"/>
+          <p:cNvPr id="2034763166" name="Arrow: Right 1"/>
           <p:cNvSpPr/>
           <p:nvPr/>
         </p:nvSpPr>
@@ -17934,7 +18251,7 @@
       </p:sp>
       <p:sp>
         <p:nvSpPr>
-          <p:cNvPr id="43401425" name="Arrow: Right 8"/>
+          <p:cNvPr id="743755761" name="Arrow: Right 8"/>
           <p:cNvSpPr/>
           <p:nvPr/>
         </p:nvSpPr>
@@ -17979,7 +18296,7 @@
       </p:sp>
       <p:sp>
         <p:nvSpPr>
-          <p:cNvPr id="573172879" name="TextBox 10"/>
+          <p:cNvPr id="1328150232" name="TextBox 10"/>
           <p:cNvSpPr txBox="1"/>
           <p:nvPr/>
         </p:nvSpPr>
@@ -18026,7 +18343,7 @@
       </p:sp>
       <p:sp>
         <p:nvSpPr>
-          <p:cNvPr id="959306866" name="Footer Placeholder 2"/>
+          <p:cNvPr id="1227497892" name="Footer Placeholder 2"/>
           <p:cNvSpPr>
             <a:spLocks noGrp="1"/>
           </p:cNvSpPr>
@@ -18085,7 +18402,7 @@
       </p:grpSpPr>
       <p:sp>
         <p:nvSpPr>
-          <p:cNvPr id="1160690472" name="Title 5"/>
+          <p:cNvPr id="576232317" name="Title 5"/>
           <p:cNvSpPr>
             <a:spLocks noGrp="1"/>
           </p:cNvSpPr>
@@ -18122,7 +18439,7 @@
       </p:sp>
       <p:sp>
         <p:nvSpPr>
-          <p:cNvPr id="585896400" name="Content Placeholder 6"/>
+          <p:cNvPr id="117190589" name="Content Placeholder 6"/>
           <p:cNvSpPr>
             <a:spLocks noGrp="1"/>
           </p:cNvSpPr>
@@ -18168,7 +18485,7 @@
       </p:sp>
       <p:pic>
         <p:nvPicPr>
-          <p:cNvPr id="77134515" name="Picture 4"/>
+          <p:cNvPr id="445377650" name="Picture 4"/>
           <p:cNvPicPr>
             <a:picLocks noChangeAspect="1" noChangeArrowheads="1"/>
           </p:cNvPicPr>
@@ -18198,7 +18515,7 @@
       </p:pic>
       <p:pic>
         <p:nvPicPr>
-          <p:cNvPr id="893747922" name="Picture 6"/>
+          <p:cNvPr id="331577662" name="Picture 6"/>
           <p:cNvPicPr>
             <a:picLocks noChangeAspect="1" noChangeArrowheads="1"/>
           </p:cNvPicPr>
@@ -18228,7 +18545,7 @@
       </p:pic>
       <p:sp>
         <p:nvSpPr>
-          <p:cNvPr id="1981816245" name="Arrow: Right 1"/>
+          <p:cNvPr id="1065325440" name="Arrow: Right 1"/>
           <p:cNvSpPr/>
           <p:nvPr/>
         </p:nvSpPr>
@@ -18273,7 +18590,7 @@
       </p:sp>
       <p:sp>
         <p:nvSpPr>
-          <p:cNvPr id="1975210983" name="Arrow: Right 8"/>
+          <p:cNvPr id="214105518" name="Arrow: Right 8"/>
           <p:cNvSpPr/>
           <p:nvPr/>
         </p:nvSpPr>
@@ -18318,7 +18635,7 @@
       </p:sp>
       <p:sp>
         <p:nvSpPr>
-          <p:cNvPr id="2008014441" name="TextBox 10"/>
+          <p:cNvPr id="481665718" name="TextBox 10"/>
           <p:cNvSpPr txBox="1"/>
           <p:nvPr/>
         </p:nvSpPr>
@@ -18365,7 +18682,7 @@
       </p:sp>
       <p:sp>
         <p:nvSpPr>
-          <p:cNvPr id="190410778" name="TextBox 12"/>
+          <p:cNvPr id="883521247" name="TextBox 12"/>
           <p:cNvSpPr txBox="1"/>
           <p:nvPr/>
         </p:nvSpPr>
@@ -18412,7 +18729,7 @@
       </p:sp>
       <p:pic>
         <p:nvPicPr>
-          <p:cNvPr id="1821677534" name="Graphic 4"/>
+          <p:cNvPr id="1227000533" name="Graphic 4"/>
           <p:cNvPicPr>
             <a:picLocks noChangeAspect="1"/>
           </p:cNvPicPr>
@@ -18434,7 +18751,7 @@
       </p:pic>
       <p:sp>
         <p:nvSpPr>
-          <p:cNvPr id="1435837030" name="Footer Placeholder 2"/>
+          <p:cNvPr id="1196690080" name="Footer Placeholder 2"/>
           <p:cNvSpPr>
             <a:spLocks noGrp="1"/>
           </p:cNvSpPr>
@@ -18493,7 +18810,7 @@
       </p:grpSpPr>
       <p:sp>
         <p:nvSpPr>
-          <p:cNvPr id="1913858593" name="Title 5"/>
+          <p:cNvPr id="1697698834" name="Title 5"/>
           <p:cNvSpPr>
             <a:spLocks noGrp="1"/>
           </p:cNvSpPr>
@@ -18526,7 +18843,7 @@
       </p:sp>
       <p:sp>
         <p:nvSpPr>
-          <p:cNvPr id="2000003138" name="Content Placeholder 6"/>
+          <p:cNvPr id="809504580" name="Content Placeholder 6"/>
           <p:cNvSpPr>
             <a:spLocks noGrp="1"/>
           </p:cNvSpPr>
@@ -18561,7 +18878,7 @@
       </p:sp>
       <p:grpSp>
         <p:nvGrpSpPr>
-          <p:cNvPr id="1094267030" name="Group 7"/>
+          <p:cNvPr id="1446886762" name="Group 7"/>
           <p:cNvGrpSpPr/>
           <p:nvPr/>
         </p:nvGrpSpPr>
@@ -18872,7 +19189,7 @@
       </p:grpSp>
       <p:grpSp>
         <p:nvGrpSpPr>
-          <p:cNvPr id="1932215644" name="Group 27"/>
+          <p:cNvPr id="1813375742" name="Group 27"/>
           <p:cNvGrpSpPr/>
           <p:nvPr/>
         </p:nvGrpSpPr>
@@ -18953,7 +19270,7 @@
       </p:grpSp>
       <p:sp>
         <p:nvSpPr>
-          <p:cNvPr id="97086887" name="Footer Placeholder 9"/>
+          <p:cNvPr id="904507993" name="Footer Placeholder 9"/>
           <p:cNvSpPr>
             <a:spLocks noGrp="1"/>
           </p:cNvSpPr>
@@ -19012,7 +19329,7 @@
       </p:grpSpPr>
       <p:sp>
         <p:nvSpPr>
-          <p:cNvPr id="1677576260" name="Title 5"/>
+          <p:cNvPr id="951306198" name="Title 5"/>
           <p:cNvSpPr>
             <a:spLocks noGrp="1"/>
           </p:cNvSpPr>
@@ -19045,7 +19362,7 @@
       </p:sp>
       <p:sp>
         <p:nvSpPr>
-          <p:cNvPr id="479688359" name="Content Placeholder 6"/>
+          <p:cNvPr id="7353364" name="Content Placeholder 6"/>
           <p:cNvSpPr>
             <a:spLocks noGrp="1"/>
           </p:cNvSpPr>
@@ -19080,7 +19397,7 @@
       </p:sp>
       <p:grpSp>
         <p:nvGrpSpPr>
-          <p:cNvPr id="391529600" name="Group 7"/>
+          <p:cNvPr id="577921746" name="Group 7"/>
           <p:cNvGrpSpPr/>
           <p:nvPr/>
         </p:nvGrpSpPr>
@@ -19391,7 +19708,7 @@
       </p:grpSp>
       <p:grpSp>
         <p:nvGrpSpPr>
-          <p:cNvPr id="1079216239" name="Group 27"/>
+          <p:cNvPr id="1967387059" name="Group 27"/>
           <p:cNvGrpSpPr/>
           <p:nvPr/>
         </p:nvGrpSpPr>
@@ -19516,7 +19833,7 @@
       </p:grpSp>
       <p:sp>
         <p:nvSpPr>
-          <p:cNvPr id="962373276" name="Footer Placeholder 9"/>
+          <p:cNvPr id="144499070" name="Footer Placeholder 9"/>
           <p:cNvSpPr>
             <a:spLocks noGrp="1"/>
           </p:cNvSpPr>
